--- a/presentation/figures_deck.pptx
+++ b/presentation/figures_deck.pptx
@@ -4,6 +4,9 @@
   <p:sldMasterIdLst>
     <p:sldMasterId id="2147483648" r:id="rId1"/>
   </p:sldMasterIdLst>
+  <p:notesMasterIdLst>
+    <p:notesMasterId r:id="rId15"/>
+  </p:notesMasterIdLst>
   <p:sldIdLst>
     <p:sldId id="256" r:id="rId2"/>
     <p:sldId id="257" r:id="rId3"/>
@@ -19,9 +22,6 @@
     <p:sldId id="267" r:id="rId13"/>
     <p:sldId id="268" r:id="rId14"/>
   </p:sldIdLst>
-  <p:notesMasterIdLst>
-    <p:notesMasterId r:id="rId15"/>
-  </p:notesMasterIdLst>
   <p:sldSz cx="12192000" cy="6858000"/>
   <p:notesSz cx="6858000" cy="12192000"/>
   <p:defaultTextStyle>
@@ -116,6 +116,11 @@
       </a:defRPr>
     </a:lvl9pPr>
   </p:defaultTextStyle>
+  <p:extLst>
+    <p:ext uri="{EFAFB233-063F-42B5-8137-9DF3F51BA10A}">
+      <p15:sldGuideLst xmlns:p15="http://schemas.microsoft.com/office/powerpoint/2012/main"/>
+    </p:ext>
+  </p:extLst>
 </p:presentation>
 </file>
 
@@ -141,234 +146,10 @@
           <a:chExt cx="0" cy="0"/>
         </a:xfrm>
       </p:grpSpPr>
-      <p:sp>
-        <p:nvSpPr>
-          <p:cNvPr id="2" name="Header Placeholder 1"/>
-          <p:cNvSpPr>
-            <a:spLocks noGrp="1"/>
-          </p:cNvSpPr>
-          <p:nvPr>
-            <p:ph type="hdr" sz="quarter"/>
-          </p:nvPr>
-        </p:nvSpPr>
-        <p:spPr>
-          <a:xfrm>
-            <a:off x="0" y="0"/>
-            <a:ext cx="2971800" cy="458788"/>
-          </a:xfrm>
-          <a:prstGeom prst="rect">
-            <a:avLst/>
-          </a:prstGeom>
-        </p:spPr>
-        <p:txBody>
-          <a:bodyPr vert="horz" lIns="91440" tIns="45720" rIns="91440" bIns="45720" rtlCol="0"/>
-          <a:lstStyle>
-            <a:lvl1pPr algn="l">
-              <a:defRPr sz="1200"/>
-            </a:lvl1pPr>
-          </a:lstStyle>
-          <a:p>
-            <a:endParaRPr lang="en-US"/>
-          </a:p>
-        </p:txBody>
-      </p:sp>
-      <p:sp>
-        <p:nvSpPr>
-          <p:cNvPr id="3" name="Date Placeholder 2"/>
-          <p:cNvSpPr>
-            <a:spLocks noGrp="1"/>
-          </p:cNvSpPr>
-          <p:nvPr>
-            <p:ph type="dt" idx="1"/>
-          </p:nvPr>
-        </p:nvSpPr>
-        <p:spPr>
-          <a:xfrm>
-            <a:off x="3884613" y="0"/>
-            <a:ext cx="2971800" cy="458788"/>
-          </a:xfrm>
-          <a:prstGeom prst="rect">
-            <a:avLst/>
-          </a:prstGeom>
-        </p:spPr>
-        <p:txBody>
-          <a:bodyPr vert="horz" lIns="91440" tIns="45720" rIns="91440" bIns="45720" rtlCol="0"/>
-          <a:lstStyle>
-            <a:lvl1pPr algn="r">
-              <a:defRPr sz="1200"/>
-            </a:lvl1pPr>
-          </a:lstStyle>
-          <a:p>
-            <a:fld id="{5282F153-3F37-0F45-9E97-73ACFA13230C}" type="datetimeFigureOut">
-              <a:rPr lang="en-US"/>
-              <a:t>7/23/19</a:t>
-            </a:fld>
-            <a:endParaRPr lang="en-US"/>
-          </a:p>
-        </p:txBody>
-      </p:sp>
-      <p:sp>
-        <p:nvSpPr>
-          <p:cNvPr id="4" name="Slide Image Placeholder 3"/>
-          <p:cNvSpPr>
-            <a:spLocks noGrp="1" noRot="1" noChangeAspect="1"/>
-          </p:cNvSpPr>
-          <p:nvPr>
-            <p:ph type="sldImg" idx="2"/>
-          </p:nvPr>
-        </p:nvSpPr>
-        <p:spPr>
-          <a:xfrm>
-            <a:off x="685800" y="1143000"/>
-            <a:ext cx="5486400" cy="3086100"/>
-          </a:xfrm>
-          <a:prstGeom prst="rect">
-            <a:avLst/>
-          </a:prstGeom>
-          <a:noFill/>
-          <a:ln w="12700">
-            <a:solidFill>
-              <a:prstClr val="black"/>
-            </a:solidFill>
-          </a:ln>
-        </p:spPr>
-        <p:txBody>
-          <a:bodyPr vert="horz" lIns="91440" tIns="45720" rIns="91440" bIns="45720" rtlCol="0" anchor="ctr"/>
-          <a:lstStyle/>
-          <a:p>
-            <a:endParaRPr lang="en-US"/>
-          </a:p>
-        </p:txBody>
-      </p:sp>
-      <p:sp>
-        <p:nvSpPr>
-          <p:cNvPr id="5" name="Notes Placeholder 4"/>
-          <p:cNvSpPr>
-            <a:spLocks noGrp="1"/>
-          </p:cNvSpPr>
-          <p:nvPr>
-            <p:ph type="body" sz="quarter" idx="3"/>
-          </p:nvPr>
-        </p:nvSpPr>
-        <p:spPr>
-          <a:xfrm>
-            <a:off x="685800" y="4400550"/>
-            <a:ext cx="5486400" cy="3600450"/>
-          </a:xfrm>
-          <a:prstGeom prst="rect">
-            <a:avLst/>
-          </a:prstGeom>
-        </p:spPr>
-        <p:txBody>
-          <a:bodyPr vert="horz" lIns="91440" tIns="45720" rIns="91440" bIns="45720" rtlCol="0"/>
-          <a:lstStyle/>
-          <a:p>
-            <a:pPr lvl="0"/>
-            <a:r>
-              <a:rPr lang="en-US"/>
-              <a:t>Click to edit Master text styles</a:t>
-            </a:r>
-          </a:p>
-          <a:p>
-            <a:pPr lvl="1"/>
-            <a:r>
-              <a:rPr lang="en-US"/>
-              <a:t>Second level</a:t>
-            </a:r>
-          </a:p>
-          <a:p>
-            <a:pPr lvl="2"/>
-            <a:r>
-              <a:rPr lang="en-US"/>
-              <a:t>Third level</a:t>
-            </a:r>
-          </a:p>
-          <a:p>
-            <a:pPr lvl="3"/>
-            <a:r>
-              <a:rPr lang="en-US"/>
-              <a:t>Fourth level</a:t>
-            </a:r>
-          </a:p>
-          <a:p>
-            <a:pPr lvl="4"/>
-            <a:r>
-              <a:rPr lang="en-US"/>
-              <a:t>Fifth level</a:t>
-            </a:r>
-          </a:p>
-        </p:txBody>
-      </p:sp>
-      <p:sp>
-        <p:nvSpPr>
-          <p:cNvPr id="6" name="Footer Placeholder 5"/>
-          <p:cNvSpPr>
-            <a:spLocks noGrp="1"/>
-          </p:cNvSpPr>
-          <p:nvPr>
-            <p:ph type="ftr" sz="quarter" idx="4"/>
-          </p:nvPr>
-        </p:nvSpPr>
-        <p:spPr>
-          <a:xfrm>
-            <a:off x="0" y="8685213"/>
-            <a:ext cx="2971800" cy="458787"/>
-          </a:xfrm>
-          <a:prstGeom prst="rect">
-            <a:avLst/>
-          </a:prstGeom>
-        </p:spPr>
-        <p:txBody>
-          <a:bodyPr vert="horz" lIns="91440" tIns="45720" rIns="91440" bIns="45720" rtlCol="0" anchor="b"/>
-          <a:lstStyle>
-            <a:lvl1pPr algn="l">
-              <a:defRPr sz="1200"/>
-            </a:lvl1pPr>
-          </a:lstStyle>
-          <a:p>
-            <a:endParaRPr lang="en-US"/>
-          </a:p>
-        </p:txBody>
-      </p:sp>
-      <p:sp>
-        <p:nvSpPr>
-          <p:cNvPr id="7" name="Slide Number Placeholder 6"/>
-          <p:cNvSpPr>
-            <a:spLocks noGrp="1"/>
-          </p:cNvSpPr>
-          <p:nvPr>
-            <p:ph type="sldNum" sz="quarter" idx="5"/>
-          </p:nvPr>
-        </p:nvSpPr>
-        <p:spPr>
-          <a:xfrm>
-            <a:off x="3884613" y="8685213"/>
-            <a:ext cx="2971800" cy="458787"/>
-          </a:xfrm>
-          <a:prstGeom prst="rect">
-            <a:avLst/>
-          </a:prstGeom>
-        </p:spPr>
-        <p:txBody>
-          <a:bodyPr vert="horz" lIns="91440" tIns="45720" rIns="91440" bIns="45720" rtlCol="0" anchor="b"/>
-          <a:lstStyle>
-            <a:lvl1pPr algn="r">
-              <a:defRPr sz="1200"/>
-            </a:lvl1pPr>
-          </a:lstStyle>
-          <a:p>
-            <a:fld id="{CE5E9CC1-C706-0F49-92D6-E571CC5EEA8F}" type="slidenum">
-              <a:rPr lang="en-US"/>
-              <a:t>‹#›</a:t>
-            </a:fld>
-            <a:endParaRPr lang="en-US"/>
-          </a:p>
-        </p:txBody>
-      </p:sp>
     </p:spTree>
     <p:extLst>
       <p:ext uri="{BB962C8B-B14F-4D97-AF65-F5344CB8AC3E}">
-        <p14:creationId xmlns:p14="http://schemas.microsoft.com/office/powerpoint/2010/main" val="1024086991"/>
+        <p14:creationId xmlns:p14="http://schemas.microsoft.com/office/powerpoint/2010/main" val="2395681583"/>
       </p:ext>
     </p:extLst>
   </p:cSld>
@@ -512,10 +293,6 @@
           <a:bodyPr/>
           <a:lstStyle/>
           <a:p>
-            <a:r>
-              <a:rPr lang="en-US" dirty="0"/>
-              <a:t/>
-            </a:r>
             <a:endParaRPr lang="en-US" dirty="0"/>
           </a:p>
         </p:txBody>
@@ -600,10 +377,6 @@
           <a:bodyPr/>
           <a:lstStyle/>
           <a:p>
-            <a:r>
-              <a:rPr lang="en-US" dirty="0"/>
-              <a:t/>
-            </a:r>
             <a:endParaRPr lang="en-US" dirty="0"/>
           </a:p>
         </p:txBody>
@@ -688,10 +461,6 @@
           <a:bodyPr/>
           <a:lstStyle/>
           <a:p>
-            <a:r>
-              <a:rPr lang="en-US" dirty="0"/>
-              <a:t/>
-            </a:r>
             <a:endParaRPr lang="en-US" dirty="0"/>
           </a:p>
         </p:txBody>
@@ -776,10 +545,6 @@
           <a:bodyPr/>
           <a:lstStyle/>
           <a:p>
-            <a:r>
-              <a:rPr lang="en-US" dirty="0"/>
-              <a:t/>
-            </a:r>
             <a:endParaRPr lang="en-US" dirty="0"/>
           </a:p>
         </p:txBody>
@@ -864,10 +629,6 @@
           <a:bodyPr/>
           <a:lstStyle/>
           <a:p>
-            <a:r>
-              <a:rPr lang="en-US" dirty="0"/>
-              <a:t/>
-            </a:r>
             <a:endParaRPr lang="en-US" dirty="0"/>
           </a:p>
         </p:txBody>
@@ -952,10 +713,6 @@
           <a:bodyPr/>
           <a:lstStyle/>
           <a:p>
-            <a:r>
-              <a:rPr lang="en-US" dirty="0"/>
-              <a:t/>
-            </a:r>
             <a:endParaRPr lang="en-US" dirty="0"/>
           </a:p>
         </p:txBody>
@@ -1040,10 +797,6 @@
           <a:bodyPr/>
           <a:lstStyle/>
           <a:p>
-            <a:r>
-              <a:rPr lang="en-US" dirty="0"/>
-              <a:t/>
-            </a:r>
             <a:endParaRPr lang="en-US" dirty="0"/>
           </a:p>
         </p:txBody>
@@ -1128,10 +881,6 @@
           <a:bodyPr/>
           <a:lstStyle/>
           <a:p>
-            <a:r>
-              <a:rPr lang="en-US" dirty="0"/>
-              <a:t/>
-            </a:r>
             <a:endParaRPr lang="en-US" dirty="0"/>
           </a:p>
         </p:txBody>
@@ -1216,10 +965,6 @@
           <a:bodyPr/>
           <a:lstStyle/>
           <a:p>
-            <a:r>
-              <a:rPr lang="en-US" dirty="0"/>
-              <a:t/>
-            </a:r>
             <a:endParaRPr lang="en-US" dirty="0"/>
           </a:p>
         </p:txBody>
@@ -1304,10 +1049,6 @@
           <a:bodyPr/>
           <a:lstStyle/>
           <a:p>
-            <a:r>
-              <a:rPr lang="en-US" dirty="0"/>
-              <a:t/>
-            </a:r>
             <a:endParaRPr lang="en-US" dirty="0"/>
           </a:p>
         </p:txBody>
@@ -1392,10 +1133,6 @@
           <a:bodyPr/>
           <a:lstStyle/>
           <a:p>
-            <a:r>
-              <a:rPr lang="en-US" dirty="0"/>
-              <a:t/>
-            </a:r>
             <a:endParaRPr lang="en-US" dirty="0"/>
           </a:p>
         </p:txBody>
@@ -1480,10 +1217,6 @@
           <a:bodyPr/>
           <a:lstStyle/>
           <a:p>
-            <a:r>
-              <a:rPr lang="en-US" dirty="0"/>
-              <a:t/>
-            </a:r>
             <a:endParaRPr lang="en-US" dirty="0"/>
           </a:p>
         </p:txBody>
@@ -1568,10 +1301,6 @@
           <a:bodyPr/>
           <a:lstStyle/>
           <a:p>
-            <a:r>
-              <a:rPr lang="en-US" dirty="0"/>
-              <a:t/>
-            </a:r>
             <a:endParaRPr lang="en-US" dirty="0"/>
           </a:p>
         </p:txBody>
@@ -1645,6 +1374,11 @@
 <file path=ppt/slideMasters/slideMaster1.xml><?xml version="1.0" encoding="utf-8"?>
 <p:sldMaster xmlns:a="http://schemas.openxmlformats.org/drawingml/2006/main" xmlns:r="http://schemas.openxmlformats.org/officeDocument/2006/relationships" xmlns:p="http://schemas.openxmlformats.org/presentationml/2006/main">
   <p:cSld>
+    <p:bg>
+      <p:bgRef idx="1001">
+        <a:schemeClr val="bg1"/>
+      </p:bgRef>
+    </p:bg>
     <p:spTree>
       <p:nvGrpSpPr>
         <p:cNvPr id="1" name=""/>
@@ -1927,6 +1661,7 @@
         <a:solidFill>
           <a:srgbClr val="FAF9F5"/>
         </a:solidFill>
+        <a:effectLst/>
       </p:bgPr>
     </p:bg>
     <p:spTree>
@@ -1964,11 +1699,11 @@
           <a:bodyPr wrap="square" lIns="0" tIns="0" rIns="0" bIns="0" rtlCol="0" anchor="ctr"/>
           <a:lstStyle/>
           <a:p>
-            <a:pPr indent="0" marL="0">
-              <a:buNone/>
-            </a:pPr>
-            <a:r>
-              <a:rPr lang="en-US" sz="1200" b="1" spc="500" kern="0" dirty="0">
+            <a:pPr marL="0" indent="0">
+              <a:buNone/>
+            </a:pPr>
+            <a:r>
+              <a:rPr lang="en-US" sz="1200" b="1" kern="0" spc="500" dirty="0">
                 <a:solidFill>
                   <a:srgbClr val="CC785C"/>
                 </a:solidFill>
@@ -2003,7 +1738,7 @@
           <a:bodyPr wrap="square" lIns="0" tIns="0" rIns="0" bIns="0" rtlCol="0" anchor="ctr"/>
           <a:lstStyle/>
           <a:p>
-            <a:pPr indent="0" marL="0">
+            <a:pPr marL="0" indent="0">
               <a:buNone/>
             </a:pPr>
             <a:r>
@@ -2042,7 +1777,7 @@
           <a:bodyPr wrap="square" lIns="0" tIns="0" rIns="0" bIns="0" rtlCol="0" anchor="ctr"/>
           <a:lstStyle/>
           <a:p>
-            <a:pPr indent="0" marL="0">
+            <a:pPr marL="0" indent="0">
               <a:lnSpc>
                 <a:spcPct val="130000"/>
               </a:lnSpc>
@@ -2062,7 +1797,7 @@
             <a:endParaRPr lang="en-US" sz="1600" dirty="0"/>
           </a:p>
           <a:p>
-            <a:pPr indent="0" marL="0">
+            <a:pPr marL="0" indent="0">
               <a:lnSpc>
                 <a:spcPct val="130000"/>
               </a:lnSpc>
@@ -2077,7 +1812,7 @@
                 <a:ea typeface="Georgia" pitchFamily="34" charset="-122"/>
                 <a:cs typeface="Georgia" pitchFamily="34" charset="-120"/>
               </a:rPr>
-              <a:t>Each slide: what the figure shows, in plain terms — and the question to expect.</a:t>
+              <a:t>Each slide: what the figure shows, in plain terms.</a:t>
             </a:r>
             <a:endParaRPr lang="en-US" sz="1600" dirty="0"/>
           </a:p>
@@ -2102,6 +1837,13 @@
           </a:solidFill>
           <a:ln/>
         </p:spPr>
+        <p:txBody>
+          <a:bodyPr/>
+          <a:lstStyle/>
+          <a:p>
+            <a:endParaRPr lang="en-US"/>
+          </a:p>
+        </p:txBody>
       </p:sp>
       <p:sp>
         <p:nvSpPr>
@@ -2124,11 +1866,11 @@
           <a:bodyPr wrap="square" lIns="0" tIns="0" rIns="0" bIns="0" rtlCol="0" anchor="ctr"/>
           <a:lstStyle/>
           <a:p>
-            <a:pPr indent="0" marL="0">
-              <a:buNone/>
-            </a:pPr>
-            <a:r>
-              <a:rPr lang="en-US" sz="1000" spc="200" kern="0" dirty="0">
+            <a:pPr marL="0" indent="0">
+              <a:buNone/>
+            </a:pPr>
+            <a:r>
+              <a:rPr lang="en-US" sz="1000" kern="0" spc="200" dirty="0">
                 <a:solidFill>
                   <a:srgbClr val="5B5B5B"/>
                 </a:solidFill>
@@ -2158,6 +1900,7 @@
         <a:solidFill>
           <a:srgbClr val="FAF9F5"/>
         </a:solidFill>
+        <a:effectLst/>
       </p:bgPr>
     </p:bg>
     <p:spTree>
@@ -2195,11 +1938,11 @@
           <a:bodyPr wrap="square" lIns="0" tIns="0" rIns="0" bIns="0" rtlCol="0" anchor="ctr"/>
           <a:lstStyle/>
           <a:p>
-            <a:pPr indent="0" marL="0">
-              <a:buNone/>
-            </a:pPr>
-            <a:r>
-              <a:rPr lang="en-US" sz="1000" b="1" spc="400" kern="0" dirty="0">
+            <a:pPr marL="0" indent="0">
+              <a:buNone/>
+            </a:pPr>
+            <a:r>
+              <a:rPr lang="en-US" sz="1000" b="1" kern="0" spc="400" dirty="0">
                 <a:solidFill>
                   <a:srgbClr val="CC785C"/>
                 </a:solidFill>
@@ -2234,7 +1977,7 @@
           <a:bodyPr wrap="square" lIns="0" tIns="0" rIns="0" bIns="0" rtlCol="0" anchor="t"/>
           <a:lstStyle/>
           <a:p>
-            <a:pPr algn="l" indent="0" marL="0">
+            <a:pPr marL="0" indent="0" algn="l">
               <a:buNone/>
             </a:pPr>
             <a:r>
@@ -2276,18 +2019,25 @@
             <a:prstDash val="solid"/>
           </a:ln>
         </p:spPr>
+        <p:txBody>
+          <a:bodyPr/>
+          <a:lstStyle/>
+          <a:p>
+            <a:endParaRPr lang="en-US"/>
+          </a:p>
+        </p:txBody>
       </p:sp>
       <p:pic>
         <p:nvPicPr>
-          <p:cNvPr id="5" name="Image 0" descr="../results/plots/sae_topk_only.png">    </p:cNvPr>
+          <p:cNvPr id="5" name="Image 0" descr="../results/plots/sae_topk_only.png"/>
           <p:cNvPicPr>
             <a:picLocks noChangeAspect="1"/>
           </p:cNvPicPr>
           <p:nvPr/>
         </p:nvPicPr>
         <p:blipFill>
-          <a:blip r:embed="rId1"/>
-          <a:srcRect l="0" r="0" t="0" b="0"/>
+          <a:blip r:embed="rId3"/>
+          <a:srcRect/>
           <a:stretch/>
         </p:blipFill>
         <p:spPr>
@@ -2321,11 +2071,11 @@
           <a:bodyPr wrap="square" lIns="0" tIns="0" rIns="0" bIns="0" rtlCol="0" anchor="ctr"/>
           <a:lstStyle/>
           <a:p>
-            <a:pPr indent="0" marL="0">
-              <a:buNone/>
-            </a:pPr>
-            <a:r>
-              <a:rPr lang="en-US" sz="1100" b="1" spc="300" kern="0" dirty="0">
+            <a:pPr marL="0" indent="0">
+              <a:buNone/>
+            </a:pPr>
+            <a:r>
+              <a:rPr lang="en-US" sz="1100" b="1" kern="0" spc="300" dirty="0">
                 <a:solidFill>
                   <a:srgbClr val="CC785C"/>
                 </a:solidFill>
@@ -2360,7 +2110,7 @@
           <a:bodyPr wrap="square" lIns="0" tIns="0" rIns="0" bIns="0" rtlCol="0" anchor="t"/>
           <a:lstStyle/>
           <a:p>
-            <a:pPr algn="l" marL="177800" indent="-177800">
+            <a:pPr marL="177800" indent="-177800" algn="l">
               <a:lnSpc>
                 <a:spcPct val="112000"/>
               </a:lnSpc>
@@ -2384,7 +2134,7 @@
             <a:endParaRPr lang="en-US" sz="1300" dirty="0"/>
           </a:p>
           <a:p>
-            <a:pPr algn="l" marL="177800" indent="-177800">
+            <a:pPr marL="177800" indent="-177800" algn="l">
               <a:lnSpc>
                 <a:spcPct val="112000"/>
               </a:lnSpc>
@@ -2408,7 +2158,7 @@
             <a:endParaRPr lang="en-US" sz="1300" dirty="0"/>
           </a:p>
           <a:p>
-            <a:pPr algn="l" marL="177800" indent="-177800">
+            <a:pPr marL="177800" indent="-177800" algn="l">
               <a:lnSpc>
                 <a:spcPct val="112000"/>
               </a:lnSpc>
@@ -2452,6 +2202,13 @@
           </a:solidFill>
           <a:ln/>
         </p:spPr>
+        <p:txBody>
+          <a:bodyPr/>
+          <a:lstStyle/>
+          <a:p>
+            <a:endParaRPr lang="en-US"/>
+          </a:p>
+        </p:txBody>
       </p:sp>
       <p:sp>
         <p:nvSpPr>
@@ -2472,6 +2229,13 @@
           </a:solidFill>
           <a:ln/>
         </p:spPr>
+        <p:txBody>
+          <a:bodyPr/>
+          <a:lstStyle/>
+          <a:p>
+            <a:endParaRPr lang="en-US"/>
+          </a:p>
+        </p:txBody>
       </p:sp>
       <p:sp>
         <p:nvSpPr>
@@ -2494,20 +2258,9 @@
           <a:bodyPr wrap="square" lIns="0" tIns="0" rIns="0" bIns="0" rtlCol="0" anchor="ctr"/>
           <a:lstStyle/>
           <a:p>
-            <a:pPr indent="0" marL="0">
-              <a:buNone/>
-            </a:pPr>
-            <a:r>
-              <a:rPr lang="en-US" sz="1000" b="1" spc="300" kern="0" dirty="0">
-                <a:solidFill>
-                  <a:srgbClr val="CC785C"/>
-                </a:solidFill>
-                <a:latin typeface="Menlo" pitchFamily="34" charset="0"/>
-                <a:ea typeface="Menlo" pitchFamily="34" charset="-122"/>
-                <a:cs typeface="Menlo" pitchFamily="34" charset="-120"/>
-              </a:rPr>
-              <a:t>IF ASKED</a:t>
-            </a:r>
+            <a:pPr marL="0" indent="0">
+              <a:buNone/>
+            </a:pPr>
             <a:endParaRPr lang="en-US" sz="1000" dirty="0"/>
           </a:p>
         </p:txBody>
@@ -2520,7 +2273,7 @@
         </p:nvSpPr>
         <p:spPr>
           <a:xfrm>
-            <a:off x="7836408" y="4800600"/>
+            <a:off x="7836408" y="4466844"/>
             <a:ext cx="3687775" cy="1234440"/>
           </a:xfrm>
           <a:prstGeom prst="rect">
@@ -2533,7 +2286,7 @@
           <a:bodyPr wrap="square" lIns="0" tIns="0" rIns="0" bIns="0" rtlCol="0" anchor="t"/>
           <a:lstStyle/>
           <a:p>
-            <a:pPr algn="l" indent="0" marL="0">
+            <a:pPr marL="0" indent="0" algn="l">
               <a:lnSpc>
                 <a:spcPct val="118000"/>
               </a:lnSpc>
@@ -2550,54 +2303,48 @@
               </a:rPr>
               <a:t>Q  </a:t>
             </a:r>
-            <a:pPr algn="l" indent="0" marL="0">
+            <a:r>
+              <a:rPr lang="en-US" sz="1200" i="1" dirty="0">
+                <a:solidFill>
+                  <a:srgbClr val="1A1A1A"/>
+                </a:solidFill>
+                <a:latin typeface="Georgia" pitchFamily="34" charset="0"/>
+                <a:ea typeface="Georgia" pitchFamily="34" charset="-122"/>
+                <a:cs typeface="Georgia" pitchFamily="34" charset="-120"/>
+              </a:rPr>
+              <a:t>Why not just use the single best feature?</a:t>
+            </a:r>
+            <a:endParaRPr lang="en-US" sz="1200" dirty="0"/>
+          </a:p>
+          <a:p>
+            <a:pPr marL="0" indent="0" algn="l">
               <a:lnSpc>
                 <a:spcPct val="118000"/>
               </a:lnSpc>
               <a:buNone/>
             </a:pPr>
             <a:r>
-              <a:rPr lang="en-US" sz="1200" i="1" dirty="0">
-                <a:solidFill>
-                  <a:srgbClr val="1A1A1A"/>
-                </a:solidFill>
-                <a:latin typeface="Georgia" pitchFamily="34" charset="0"/>
-                <a:ea typeface="Georgia" pitchFamily="34" charset="-122"/>
-                <a:cs typeface="Georgia" pitchFamily="34" charset="-120"/>
-              </a:rPr>
-              <a:t>Why not just use the single best feature?</a:t>
+              <a:rPr lang="en-US" sz="1200" dirty="0">
+                <a:solidFill>
+                  <a:srgbClr val="000000"/>
+                </a:solidFill>
+                <a:latin typeface="Georgia" pitchFamily="34" charset="0"/>
+                <a:ea typeface="Georgia" pitchFamily="34" charset="-122"/>
+                <a:cs typeface="Georgia" pitchFamily="34" charset="-120"/>
+              </a:rPr>
+              <a:t>
+</a:t>
             </a:r>
             <a:endParaRPr lang="en-US" sz="1200" dirty="0"/>
           </a:p>
           <a:p>
-            <a:pPr algn="l" indent="0" marL="0">
+            <a:pPr marL="0" indent="0" algn="l">
               <a:lnSpc>
                 <a:spcPct val="118000"/>
               </a:lnSpc>
               <a:buNone/>
             </a:pPr>
             <a:r>
-              <a:rPr lang="en-US" sz="1200" dirty="0">
-                <a:solidFill>
-                  <a:srgbClr val="000000"/>
-                </a:solidFill>
-                <a:latin typeface="Georgia" pitchFamily="34" charset="0"/>
-                <a:ea typeface="Georgia" pitchFamily="34" charset="-122"/>
-                <a:cs typeface="Georgia" pitchFamily="34" charset="-120"/>
-              </a:rPr>
-              <a:t>
-</a:t>
-            </a:r>
-            <a:endParaRPr lang="en-US" sz="1200" dirty="0"/>
-          </a:p>
-          <a:p>
-            <a:pPr algn="l" indent="0" marL="0">
-              <a:lnSpc>
-                <a:spcPct val="118000"/>
-              </a:lnSpc>
-              <a:buNone/>
-            </a:pPr>
-            <a:r>
               <a:rPr lang="en-US" sz="1200" b="1" dirty="0">
                 <a:solidFill>
                   <a:srgbClr val="5B5B5B"/>
@@ -2608,12 +2355,6 @@
               </a:rPr>
               <a:t>A  </a:t>
             </a:r>
-            <a:pPr algn="l" indent="0" marL="0">
-              <a:lnSpc>
-                <a:spcPct val="118000"/>
-              </a:lnSpc>
-              <a:buNone/>
-            </a:pPr>
             <a:r>
               <a:rPr lang="en-US" sz="1200" dirty="0">
                 <a:solidFill>
@@ -2650,11 +2391,11 @@
           <a:bodyPr wrap="square" lIns="0" tIns="0" rIns="0" bIns="0" rtlCol="0" anchor="ctr"/>
           <a:lstStyle/>
           <a:p>
-            <a:pPr algn="l" indent="0" marL="0">
-              <a:buNone/>
-            </a:pPr>
-            <a:r>
-              <a:rPr lang="en-US" sz="800" spc="100" kern="0" dirty="0">
+            <a:pPr marL="0" indent="0" algn="l">
+              <a:buNone/>
+            </a:pPr>
+            <a:r>
+              <a:rPr lang="en-US" sz="800" kern="0" spc="100" dirty="0">
                 <a:solidFill>
                   <a:srgbClr val="9C9489"/>
                 </a:solidFill>
@@ -2684,6 +2425,7 @@
         <a:solidFill>
           <a:srgbClr val="FAF9F5"/>
         </a:solidFill>
+        <a:effectLst/>
       </p:bgPr>
     </p:bg>
     <p:spTree>
@@ -2721,11 +2463,11 @@
           <a:bodyPr wrap="square" lIns="0" tIns="0" rIns="0" bIns="0" rtlCol="0" anchor="ctr"/>
           <a:lstStyle/>
           <a:p>
-            <a:pPr indent="0" marL="0">
-              <a:buNone/>
-            </a:pPr>
-            <a:r>
-              <a:rPr lang="en-US" sz="1000" b="1" spc="400" kern="0" dirty="0">
+            <a:pPr marL="0" indent="0">
+              <a:buNone/>
+            </a:pPr>
+            <a:r>
+              <a:rPr lang="en-US" sz="1000" b="1" kern="0" spc="400" dirty="0">
                 <a:solidFill>
                   <a:srgbClr val="CC785C"/>
                 </a:solidFill>
@@ -2760,7 +2502,7 @@
           <a:bodyPr wrap="square" lIns="0" tIns="0" rIns="0" bIns="0" rtlCol="0" anchor="t"/>
           <a:lstStyle/>
           <a:p>
-            <a:pPr algn="l" indent="0" marL="0">
+            <a:pPr marL="0" indent="0" algn="l">
               <a:buNone/>
             </a:pPr>
             <a:r>
@@ -2802,18 +2544,25 @@
             <a:prstDash val="solid"/>
           </a:ln>
         </p:spPr>
+        <p:txBody>
+          <a:bodyPr/>
+          <a:lstStyle/>
+          <a:p>
+            <a:endParaRPr lang="en-US"/>
+          </a:p>
+        </p:txBody>
       </p:sp>
       <p:pic>
         <p:nvPicPr>
-          <p:cNvPr id="5" name="Image 0" descr="../results/plots/accuracy_comparison_bar.png">    </p:cNvPr>
+          <p:cNvPr id="5" name="Image 0" descr="../results/plots/accuracy_comparison_bar.png"/>
           <p:cNvPicPr>
             <a:picLocks noChangeAspect="1"/>
           </p:cNvPicPr>
           <p:nvPr/>
         </p:nvPicPr>
         <p:blipFill>
-          <a:blip r:embed="rId1"/>
-          <a:srcRect l="0" r="0" t="0" b="0"/>
+          <a:blip r:embed="rId3"/>
+          <a:srcRect/>
           <a:stretch/>
         </p:blipFill>
         <p:spPr>
@@ -2847,11 +2596,11 @@
           <a:bodyPr wrap="square" lIns="0" tIns="0" rIns="0" bIns="0" rtlCol="0" anchor="ctr"/>
           <a:lstStyle/>
           <a:p>
-            <a:pPr indent="0" marL="0">
-              <a:buNone/>
-            </a:pPr>
-            <a:r>
-              <a:rPr lang="en-US" sz="1100" b="1" spc="300" kern="0" dirty="0">
+            <a:pPr marL="0" indent="0">
+              <a:buNone/>
+            </a:pPr>
+            <a:r>
+              <a:rPr lang="en-US" sz="1100" b="1" kern="0" spc="300" dirty="0">
                 <a:solidFill>
                   <a:srgbClr val="CC785C"/>
                 </a:solidFill>
@@ -2886,7 +2635,7 @@
           <a:bodyPr wrap="square" lIns="0" tIns="0" rIns="0" bIns="0" rtlCol="0" anchor="t"/>
           <a:lstStyle/>
           <a:p>
-            <a:pPr algn="l" marL="177800" indent="-177800">
+            <a:pPr marL="177800" indent="-177800" algn="l">
               <a:lnSpc>
                 <a:spcPct val="112000"/>
               </a:lnSpc>
@@ -2910,7 +2659,7 @@
             <a:endParaRPr lang="en-US" sz="1300" dirty="0"/>
           </a:p>
           <a:p>
-            <a:pPr algn="l" marL="177800" indent="-177800">
+            <a:pPr marL="177800" indent="-177800" algn="l">
               <a:lnSpc>
                 <a:spcPct val="112000"/>
               </a:lnSpc>
@@ -2934,7 +2683,7 @@
             <a:endParaRPr lang="en-US" sz="1300" dirty="0"/>
           </a:p>
           <a:p>
-            <a:pPr algn="l" marL="177800" indent="-177800">
+            <a:pPr marL="177800" indent="-177800" algn="l">
               <a:lnSpc>
                 <a:spcPct val="112000"/>
               </a:lnSpc>
@@ -2978,6 +2727,13 @@
           </a:solidFill>
           <a:ln/>
         </p:spPr>
+        <p:txBody>
+          <a:bodyPr/>
+          <a:lstStyle/>
+          <a:p>
+            <a:endParaRPr lang="en-US" dirty="0"/>
+          </a:p>
+        </p:txBody>
       </p:sp>
       <p:sp>
         <p:nvSpPr>
@@ -2998,6 +2754,13 @@
           </a:solidFill>
           <a:ln/>
         </p:spPr>
+        <p:txBody>
+          <a:bodyPr/>
+          <a:lstStyle/>
+          <a:p>
+            <a:endParaRPr lang="en-US"/>
+          </a:p>
+        </p:txBody>
       </p:sp>
       <p:sp>
         <p:nvSpPr>
@@ -3020,20 +2783,9 @@
           <a:bodyPr wrap="square" lIns="0" tIns="0" rIns="0" bIns="0" rtlCol="0" anchor="ctr"/>
           <a:lstStyle/>
           <a:p>
-            <a:pPr indent="0" marL="0">
-              <a:buNone/>
-            </a:pPr>
-            <a:r>
-              <a:rPr lang="en-US" sz="1000" b="1" spc="300" kern="0" dirty="0">
-                <a:solidFill>
-                  <a:srgbClr val="CC785C"/>
-                </a:solidFill>
-                <a:latin typeface="Menlo" pitchFamily="34" charset="0"/>
-                <a:ea typeface="Menlo" pitchFamily="34" charset="-122"/>
-                <a:cs typeface="Menlo" pitchFamily="34" charset="-120"/>
-              </a:rPr>
-              <a:t>IF ASKED</a:t>
-            </a:r>
+            <a:pPr marL="0" indent="0">
+              <a:buNone/>
+            </a:pPr>
             <a:endParaRPr lang="en-US" sz="1000" dirty="0"/>
           </a:p>
         </p:txBody>
@@ -3046,7 +2798,7 @@
         </p:nvSpPr>
         <p:spPr>
           <a:xfrm>
-            <a:off x="7836408" y="4800600"/>
+            <a:off x="7836408" y="4539996"/>
             <a:ext cx="3687775" cy="1234440"/>
           </a:xfrm>
           <a:prstGeom prst="rect">
@@ -3059,7 +2811,7 @@
           <a:bodyPr wrap="square" lIns="0" tIns="0" rIns="0" bIns="0" rtlCol="0" anchor="t"/>
           <a:lstStyle/>
           <a:p>
-            <a:pPr algn="l" indent="0" marL="0">
+            <a:pPr marL="0" indent="0" algn="l">
               <a:lnSpc>
                 <a:spcPct val="118000"/>
               </a:lnSpc>
@@ -3076,80 +2828,68 @@
               </a:rPr>
               <a:t>Q  </a:t>
             </a:r>
-            <a:pPr algn="l" indent="0" marL="0">
+            <a:r>
+              <a:rPr lang="en-US" sz="1200" i="1" dirty="0">
+                <a:solidFill>
+                  <a:srgbClr val="1A1A1A"/>
+                </a:solidFill>
+                <a:latin typeface="Georgia" pitchFamily="34" charset="0"/>
+                <a:ea typeface="Georgia" pitchFamily="34" charset="-122"/>
+                <a:cs typeface="Georgia" pitchFamily="34" charset="-120"/>
+              </a:rPr>
+              <a:t>So the SAE lost?</a:t>
+            </a:r>
+            <a:endParaRPr lang="en-US" sz="1200" dirty="0"/>
+          </a:p>
+          <a:p>
+            <a:pPr marL="0" indent="0" algn="l">
               <a:lnSpc>
                 <a:spcPct val="118000"/>
               </a:lnSpc>
               <a:buNone/>
             </a:pPr>
             <a:r>
-              <a:rPr lang="en-US" sz="1200" i="1" dirty="0">
-                <a:solidFill>
-                  <a:srgbClr val="1A1A1A"/>
-                </a:solidFill>
-                <a:latin typeface="Georgia" pitchFamily="34" charset="0"/>
-                <a:ea typeface="Georgia" pitchFamily="34" charset="-122"/>
-                <a:cs typeface="Georgia" pitchFamily="34" charset="-120"/>
-              </a:rPr>
-              <a:t>So the SAE lost?</a:t>
+              <a:rPr lang="en-US" sz="1200" dirty="0">
+                <a:solidFill>
+                  <a:srgbClr val="000000"/>
+                </a:solidFill>
+                <a:latin typeface="Georgia" pitchFamily="34" charset="0"/>
+                <a:ea typeface="Georgia" pitchFamily="34" charset="-122"/>
+                <a:cs typeface="Georgia" pitchFamily="34" charset="-120"/>
+              </a:rPr>
+              <a:t>
+</a:t>
             </a:r>
             <a:endParaRPr lang="en-US" sz="1200" dirty="0"/>
           </a:p>
           <a:p>
-            <a:pPr algn="l" indent="0" marL="0">
+            <a:pPr marL="0" indent="0" algn="l">
               <a:lnSpc>
                 <a:spcPct val="118000"/>
               </a:lnSpc>
               <a:buNone/>
             </a:pPr>
             <a:r>
+              <a:rPr lang="en-US" sz="1200" b="1" dirty="0">
+                <a:solidFill>
+                  <a:srgbClr val="5B5B5B"/>
+                </a:solidFill>
+                <a:latin typeface="Georgia" pitchFamily="34" charset="0"/>
+                <a:ea typeface="Georgia" pitchFamily="34" charset="-122"/>
+                <a:cs typeface="Georgia" pitchFamily="34" charset="-120"/>
+              </a:rPr>
+              <a:t>A  </a:t>
+            </a:r>
+            <a:r>
               <a:rPr lang="en-US" sz="1200" dirty="0">
                 <a:solidFill>
-                  <a:srgbClr val="000000"/>
-                </a:solidFill>
-                <a:latin typeface="Georgia" pitchFamily="34" charset="0"/>
-                <a:ea typeface="Georgia" pitchFamily="34" charset="-122"/>
-                <a:cs typeface="Georgia" pitchFamily="34" charset="-120"/>
-              </a:rPr>
-              <a:t>
-</a:t>
-            </a:r>
-            <a:endParaRPr lang="en-US" sz="1200" dirty="0"/>
-          </a:p>
-          <a:p>
-            <a:pPr algn="l" indent="0" marL="0">
-              <a:lnSpc>
-                <a:spcPct val="118000"/>
-              </a:lnSpc>
-              <a:buNone/>
-            </a:pPr>
-            <a:r>
-              <a:rPr lang="en-US" sz="1200" b="1" dirty="0">
-                <a:solidFill>
                   <a:srgbClr val="5B5B5B"/>
                 </a:solidFill>
                 <a:latin typeface="Georgia" pitchFamily="34" charset="0"/>
                 <a:ea typeface="Georgia" pitchFamily="34" charset="-122"/>
                 <a:cs typeface="Georgia" pitchFamily="34" charset="-120"/>
               </a:rPr>
-              <a:t>A  </a:t>
-            </a:r>
-            <a:pPr algn="l" indent="0" marL="0">
-              <a:lnSpc>
-                <a:spcPct val="118000"/>
-              </a:lnSpc>
-              <a:buNone/>
-            </a:pPr>
-            <a:r>
-              <a:rPr lang="en-US" sz="1200" dirty="0">
-                <a:solidFill>
-                  <a:srgbClr val="5B5B5B"/>
-                </a:solidFill>
-                <a:latin typeface="Georgia" pitchFamily="34" charset="0"/>
-                <a:ea typeface="Georgia" pitchFamily="34" charset="-122"/>
-                <a:cs typeface="Georgia" pitchFamily="34" charset="-120"/>
-              </a:rPr>
-              <a:t>On raw accuracy, yes — by about 2 points. But the SAE was never given labels, and it gives interpretable features you can read and inspect. It’s a trade-off, not a defeat.</a:t>
+              <a:t>On raw accuracy, yes — by about 2 points. But the SAE was never given labels, and it gives interpretable features you can read and inspect. </a:t>
             </a:r>
             <a:endParaRPr lang="en-US" sz="1200" dirty="0"/>
           </a:p>
@@ -3176,11 +2916,11 @@
           <a:bodyPr wrap="square" lIns="0" tIns="0" rIns="0" bIns="0" rtlCol="0" anchor="ctr"/>
           <a:lstStyle/>
           <a:p>
-            <a:pPr algn="l" indent="0" marL="0">
-              <a:buNone/>
-            </a:pPr>
-            <a:r>
-              <a:rPr lang="en-US" sz="800" spc="100" kern="0" dirty="0">
+            <a:pPr marL="0" indent="0" algn="l">
+              <a:buNone/>
+            </a:pPr>
+            <a:r>
+              <a:rPr lang="en-US" sz="800" kern="0" spc="100" dirty="0">
                 <a:solidFill>
                   <a:srgbClr val="9C9489"/>
                 </a:solidFill>
@@ -3210,6 +2950,7 @@
         <a:solidFill>
           <a:srgbClr val="FAF9F5"/>
         </a:solidFill>
+        <a:effectLst/>
       </p:bgPr>
     </p:bg>
     <p:spTree>
@@ -3247,11 +2988,11 @@
           <a:bodyPr wrap="square" lIns="0" tIns="0" rIns="0" bIns="0" rtlCol="0" anchor="ctr"/>
           <a:lstStyle/>
           <a:p>
-            <a:pPr indent="0" marL="0">
-              <a:buNone/>
-            </a:pPr>
-            <a:r>
-              <a:rPr lang="en-US" sz="1000" b="1" spc="400" kern="0" dirty="0">
+            <a:pPr marL="0" indent="0">
+              <a:buNone/>
+            </a:pPr>
+            <a:r>
+              <a:rPr lang="en-US" sz="1000" b="1" kern="0" spc="400" dirty="0">
                 <a:solidFill>
                   <a:srgbClr val="CC785C"/>
                 </a:solidFill>
@@ -3286,7 +3027,7 @@
           <a:bodyPr wrap="square" lIns="0" tIns="0" rIns="0" bIns="0" rtlCol="0" anchor="t"/>
           <a:lstStyle/>
           <a:p>
-            <a:pPr algn="l" indent="0" marL="0">
+            <a:pPr marL="0" indent="0" algn="l">
               <a:buNone/>
             </a:pPr>
             <a:r>
@@ -3328,18 +3069,25 @@
             <a:prstDash val="solid"/>
           </a:ln>
         </p:spPr>
+        <p:txBody>
+          <a:bodyPr/>
+          <a:lstStyle/>
+          <a:p>
+            <a:endParaRPr lang="en-US"/>
+          </a:p>
+        </p:txBody>
       </p:sp>
       <p:pic>
         <p:nvPicPr>
-          <p:cNvPr id="5" name="Image 0" descr="../results/plots/sae_all_cosines_hist.png">    </p:cNvPr>
+          <p:cNvPr id="5" name="Image 0" descr="../results/plots/sae_all_cosines_hist.png"/>
           <p:cNvPicPr>
             <a:picLocks noChangeAspect="1"/>
           </p:cNvPicPr>
           <p:nvPr/>
         </p:nvPicPr>
         <p:blipFill>
-          <a:blip r:embed="rId1"/>
-          <a:srcRect l="0" r="0" t="0" b="0"/>
+          <a:blip r:embed="rId3"/>
+          <a:srcRect/>
           <a:stretch/>
         </p:blipFill>
         <p:spPr>
@@ -3373,11 +3121,11 @@
           <a:bodyPr wrap="square" lIns="0" tIns="0" rIns="0" bIns="0" rtlCol="0" anchor="ctr"/>
           <a:lstStyle/>
           <a:p>
-            <a:pPr indent="0" marL="0">
-              <a:buNone/>
-            </a:pPr>
-            <a:r>
-              <a:rPr lang="en-US" sz="1100" b="1" spc="300" kern="0" dirty="0">
+            <a:pPr marL="0" indent="0">
+              <a:buNone/>
+            </a:pPr>
+            <a:r>
+              <a:rPr lang="en-US" sz="1100" b="1" kern="0" spc="300" dirty="0">
                 <a:solidFill>
                   <a:srgbClr val="CC785C"/>
                 </a:solidFill>
@@ -3412,7 +3160,7 @@
           <a:bodyPr wrap="square" lIns="0" tIns="0" rIns="0" bIns="0" rtlCol="0" anchor="t"/>
           <a:lstStyle/>
           <a:p>
-            <a:pPr algn="l" marL="177800" indent="-177800">
+            <a:pPr marL="177800" indent="-177800" algn="l">
               <a:lnSpc>
                 <a:spcPct val="112000"/>
               </a:lnSpc>
@@ -3436,7 +3184,7 @@
             <a:endParaRPr lang="en-US" sz="1300" dirty="0"/>
           </a:p>
           <a:p>
-            <a:pPr algn="l" marL="177800" indent="-177800">
+            <a:pPr marL="177800" indent="-177800" algn="l">
               <a:lnSpc>
                 <a:spcPct val="112000"/>
               </a:lnSpc>
@@ -3460,7 +3208,7 @@
             <a:endParaRPr lang="en-US" sz="1300" dirty="0"/>
           </a:p>
           <a:p>
-            <a:pPr algn="l" marL="177800" indent="-177800">
+            <a:pPr marL="177800" indent="-177800" algn="l">
               <a:lnSpc>
                 <a:spcPct val="112000"/>
               </a:lnSpc>
@@ -3504,6 +3252,13 @@
           </a:solidFill>
           <a:ln/>
         </p:spPr>
+        <p:txBody>
+          <a:bodyPr/>
+          <a:lstStyle/>
+          <a:p>
+            <a:endParaRPr lang="en-US"/>
+          </a:p>
+        </p:txBody>
       </p:sp>
       <p:sp>
         <p:nvSpPr>
@@ -3524,6 +3279,13 @@
           </a:solidFill>
           <a:ln/>
         </p:spPr>
+        <p:txBody>
+          <a:bodyPr/>
+          <a:lstStyle/>
+          <a:p>
+            <a:endParaRPr lang="en-US"/>
+          </a:p>
+        </p:txBody>
       </p:sp>
       <p:sp>
         <p:nvSpPr>
@@ -3546,20 +3308,9 @@
           <a:bodyPr wrap="square" lIns="0" tIns="0" rIns="0" bIns="0" rtlCol="0" anchor="ctr"/>
           <a:lstStyle/>
           <a:p>
-            <a:pPr indent="0" marL="0">
-              <a:buNone/>
-            </a:pPr>
-            <a:r>
-              <a:rPr lang="en-US" sz="1000" b="1" spc="300" kern="0" dirty="0">
-                <a:solidFill>
-                  <a:srgbClr val="CC785C"/>
-                </a:solidFill>
-                <a:latin typeface="Menlo" pitchFamily="34" charset="0"/>
-                <a:ea typeface="Menlo" pitchFamily="34" charset="-122"/>
-                <a:cs typeface="Menlo" pitchFamily="34" charset="-120"/>
-              </a:rPr>
-              <a:t>IF ASKED</a:t>
-            </a:r>
+            <a:pPr marL="0" indent="0">
+              <a:buNone/>
+            </a:pPr>
             <a:endParaRPr lang="en-US" sz="1000" dirty="0"/>
           </a:p>
         </p:txBody>
@@ -3572,7 +3323,7 @@
         </p:nvSpPr>
         <p:spPr>
           <a:xfrm>
-            <a:off x="7836408" y="4800600"/>
+            <a:off x="7836408" y="4565213"/>
             <a:ext cx="3687775" cy="1234440"/>
           </a:xfrm>
           <a:prstGeom prst="rect">
@@ -3585,7 +3336,7 @@
           <a:bodyPr wrap="square" lIns="0" tIns="0" rIns="0" bIns="0" rtlCol="0" anchor="t"/>
           <a:lstStyle/>
           <a:p>
-            <a:pPr algn="l" indent="0" marL="0">
+            <a:pPr marL="0" indent="0" algn="l">
               <a:lnSpc>
                 <a:spcPct val="118000"/>
               </a:lnSpc>
@@ -3602,54 +3353,48 @@
               </a:rPr>
               <a:t>Q  </a:t>
             </a:r>
-            <a:pPr algn="l" indent="0" marL="0">
+            <a:r>
+              <a:rPr lang="en-US" sz="1200" i="1" dirty="0">
+                <a:solidFill>
+                  <a:srgbClr val="1A1A1A"/>
+                </a:solidFill>
+                <a:latin typeface="Georgia" pitchFamily="34" charset="0"/>
+                <a:ea typeface="Georgia" pitchFamily="34" charset="-122"/>
+                <a:cs typeface="Georgia" pitchFamily="34" charset="-120"/>
+              </a:rPr>
+              <a:t>Is −0.22 really ‘aligned’? It sounds small.</a:t>
+            </a:r>
+            <a:endParaRPr lang="en-US" sz="1200" dirty="0"/>
+          </a:p>
+          <a:p>
+            <a:pPr marL="0" indent="0" algn="l">
               <a:lnSpc>
                 <a:spcPct val="118000"/>
               </a:lnSpc>
               <a:buNone/>
             </a:pPr>
             <a:r>
-              <a:rPr lang="en-US" sz="1200" i="1" dirty="0">
-                <a:solidFill>
-                  <a:srgbClr val="1A1A1A"/>
-                </a:solidFill>
-                <a:latin typeface="Georgia" pitchFamily="34" charset="0"/>
-                <a:ea typeface="Georgia" pitchFamily="34" charset="-122"/>
-                <a:cs typeface="Georgia" pitchFamily="34" charset="-120"/>
-              </a:rPr>
-              <a:t>Is −0.22 really ‘aligned’? It sounds small.</a:t>
+              <a:rPr lang="en-US" sz="1200" dirty="0">
+                <a:solidFill>
+                  <a:srgbClr val="000000"/>
+                </a:solidFill>
+                <a:latin typeface="Georgia" pitchFamily="34" charset="0"/>
+                <a:ea typeface="Georgia" pitchFamily="34" charset="-122"/>
+                <a:cs typeface="Georgia" pitchFamily="34" charset="-120"/>
+              </a:rPr>
+              <a:t>
+</a:t>
             </a:r>
             <a:endParaRPr lang="en-US" sz="1200" dirty="0"/>
           </a:p>
           <a:p>
-            <a:pPr algn="l" indent="0" marL="0">
+            <a:pPr marL="0" indent="0" algn="l">
               <a:lnSpc>
                 <a:spcPct val="118000"/>
               </a:lnSpc>
               <a:buNone/>
             </a:pPr>
             <a:r>
-              <a:rPr lang="en-US" sz="1200" dirty="0">
-                <a:solidFill>
-                  <a:srgbClr val="000000"/>
-                </a:solidFill>
-                <a:latin typeface="Georgia" pitchFamily="34" charset="0"/>
-                <a:ea typeface="Georgia" pitchFamily="34" charset="-122"/>
-                <a:cs typeface="Georgia" pitchFamily="34" charset="-120"/>
-              </a:rPr>
-              <a:t>
-</a:t>
-            </a:r>
-            <a:endParaRPr lang="en-US" sz="1200" dirty="0"/>
-          </a:p>
-          <a:p>
-            <a:pPr algn="l" indent="0" marL="0">
-              <a:lnSpc>
-                <a:spcPct val="118000"/>
-              </a:lnSpc>
-              <a:buNone/>
-            </a:pPr>
-            <a:r>
               <a:rPr lang="en-US" sz="1200" b="1" dirty="0">
                 <a:solidFill>
                   <a:srgbClr val="5B5B5B"/>
@@ -3660,12 +3405,6 @@
               </a:rPr>
               <a:t>A  </a:t>
             </a:r>
-            <a:pPr algn="l" indent="0" marL="0">
-              <a:lnSpc>
-                <a:spcPct val="118000"/>
-              </a:lnSpc>
-              <a:buNone/>
-            </a:pPr>
             <a:r>
               <a:rPr lang="en-US" sz="1200" dirty="0">
                 <a:solidFill>
@@ -3702,11 +3441,11 @@
           <a:bodyPr wrap="square" lIns="0" tIns="0" rIns="0" bIns="0" rtlCol="0" anchor="ctr"/>
           <a:lstStyle/>
           <a:p>
-            <a:pPr algn="l" indent="0" marL="0">
-              <a:buNone/>
-            </a:pPr>
-            <a:r>
-              <a:rPr lang="en-US" sz="800" spc="100" kern="0" dirty="0">
+            <a:pPr marL="0" indent="0" algn="l">
+              <a:buNone/>
+            </a:pPr>
+            <a:r>
+              <a:rPr lang="en-US" sz="800" kern="0" spc="100" dirty="0">
                 <a:solidFill>
                   <a:srgbClr val="9C9489"/>
                 </a:solidFill>
@@ -3736,6 +3475,7 @@
         <a:solidFill>
           <a:srgbClr val="FAF9F5"/>
         </a:solidFill>
+        <a:effectLst/>
       </p:bgPr>
     </p:bg>
     <p:spTree>
@@ -3773,11 +3513,11 @@
           <a:bodyPr wrap="square" lIns="0" tIns="0" rIns="0" bIns="0" rtlCol="0" anchor="ctr"/>
           <a:lstStyle/>
           <a:p>
-            <a:pPr indent="0" marL="0">
-              <a:buNone/>
-            </a:pPr>
-            <a:r>
-              <a:rPr lang="en-US" sz="1000" b="1" spc="400" kern="0" dirty="0">
+            <a:pPr marL="0" indent="0">
+              <a:buNone/>
+            </a:pPr>
+            <a:r>
+              <a:rPr lang="en-US" sz="1000" b="1" kern="0" spc="400" dirty="0">
                 <a:solidFill>
                   <a:srgbClr val="CC785C"/>
                 </a:solidFill>
@@ -3812,7 +3552,7 @@
           <a:bodyPr wrap="square" lIns="0" tIns="0" rIns="0" bIns="0" rtlCol="0" anchor="t"/>
           <a:lstStyle/>
           <a:p>
-            <a:pPr algn="l" indent="0" marL="0">
+            <a:pPr marL="0" indent="0" algn="l">
               <a:buNone/>
             </a:pPr>
             <a:r>
@@ -3854,18 +3594,25 @@
             <a:prstDash val="solid"/>
           </a:ln>
         </p:spPr>
+        <p:txBody>
+          <a:bodyPr/>
+          <a:lstStyle/>
+          <a:p>
+            <a:endParaRPr lang="en-US"/>
+          </a:p>
+        </p:txBody>
       </p:sp>
       <p:pic>
         <p:nvPicPr>
-          <p:cNvPr id="5" name="Image 0" descr="../results/plots/direction_subspace_projection.png">    </p:cNvPr>
+          <p:cNvPr id="5" name="Image 0" descr="../results/plots/direction_subspace_projection.png"/>
           <p:cNvPicPr>
             <a:picLocks noChangeAspect="1"/>
           </p:cNvPicPr>
           <p:nvPr/>
         </p:nvPicPr>
         <p:blipFill>
-          <a:blip r:embed="rId1"/>
-          <a:srcRect l="0" r="0" t="0" b="0"/>
+          <a:blip r:embed="rId3"/>
+          <a:srcRect/>
           <a:stretch/>
         </p:blipFill>
         <p:spPr>
@@ -3899,11 +3646,11 @@
           <a:bodyPr wrap="square" lIns="0" tIns="0" rIns="0" bIns="0" rtlCol="0" anchor="ctr"/>
           <a:lstStyle/>
           <a:p>
-            <a:pPr indent="0" marL="0">
-              <a:buNone/>
-            </a:pPr>
-            <a:r>
-              <a:rPr lang="en-US" sz="1100" b="1" spc="300" kern="0" dirty="0">
+            <a:pPr marL="0" indent="0">
+              <a:buNone/>
+            </a:pPr>
+            <a:r>
+              <a:rPr lang="en-US" sz="1100" b="1" kern="0" spc="300" dirty="0">
                 <a:solidFill>
                   <a:srgbClr val="CC785C"/>
                 </a:solidFill>
@@ -3938,7 +3685,7 @@
           <a:bodyPr wrap="square" lIns="0" tIns="0" rIns="0" bIns="0" rtlCol="0" anchor="t"/>
           <a:lstStyle/>
           <a:p>
-            <a:pPr algn="l" marL="177800" indent="-177800">
+            <a:pPr marL="177800" indent="-177800" algn="l">
               <a:lnSpc>
                 <a:spcPct val="112000"/>
               </a:lnSpc>
@@ -3962,7 +3709,7 @@
             <a:endParaRPr lang="en-US" sz="1300" dirty="0"/>
           </a:p>
           <a:p>
-            <a:pPr algn="l" marL="177800" indent="-177800">
+            <a:pPr marL="177800" indent="-177800" algn="l">
               <a:lnSpc>
                 <a:spcPct val="112000"/>
               </a:lnSpc>
@@ -3986,7 +3733,7 @@
             <a:endParaRPr lang="en-US" sz="1300" dirty="0"/>
           </a:p>
           <a:p>
-            <a:pPr algn="l" marL="177800" indent="-177800">
+            <a:pPr marL="177800" indent="-177800" algn="l">
               <a:lnSpc>
                 <a:spcPct val="112000"/>
               </a:lnSpc>
@@ -4030,6 +3777,13 @@
           </a:solidFill>
           <a:ln/>
         </p:spPr>
+        <p:txBody>
+          <a:bodyPr/>
+          <a:lstStyle/>
+          <a:p>
+            <a:endParaRPr lang="en-US"/>
+          </a:p>
+        </p:txBody>
       </p:sp>
       <p:sp>
         <p:nvSpPr>
@@ -4050,6 +3804,13 @@
           </a:solidFill>
           <a:ln/>
         </p:spPr>
+        <p:txBody>
+          <a:bodyPr/>
+          <a:lstStyle/>
+          <a:p>
+            <a:endParaRPr lang="en-US"/>
+          </a:p>
+        </p:txBody>
       </p:sp>
       <p:sp>
         <p:nvSpPr>
@@ -4072,11 +3833,11 @@
           <a:bodyPr wrap="square" lIns="0" tIns="0" rIns="0" bIns="0" rtlCol="0" anchor="ctr"/>
           <a:lstStyle/>
           <a:p>
-            <a:pPr indent="0" marL="0">
-              <a:buNone/>
-            </a:pPr>
-            <a:r>
-              <a:rPr lang="en-US" sz="1000" b="1" spc="300" kern="0" dirty="0">
+            <a:pPr marL="0" indent="0">
+              <a:buNone/>
+            </a:pPr>
+            <a:r>
+              <a:rPr lang="en-US" sz="1000" b="1" kern="0" spc="300" dirty="0">
                 <a:solidFill>
                   <a:srgbClr val="CC785C"/>
                 </a:solidFill>
@@ -4111,7 +3872,7 @@
           <a:bodyPr wrap="square" lIns="0" tIns="0" rIns="0" bIns="0" rtlCol="0" anchor="t"/>
           <a:lstStyle/>
           <a:p>
-            <a:pPr algn="l" indent="0" marL="0">
+            <a:pPr marL="0" indent="0" algn="l">
               <a:lnSpc>
                 <a:spcPct val="118000"/>
               </a:lnSpc>
@@ -4128,54 +3889,48 @@
               </a:rPr>
               <a:t>Q  </a:t>
             </a:r>
-            <a:pPr algn="l" indent="0" marL="0">
+            <a:r>
+              <a:rPr lang="en-US" sz="1200" i="1" dirty="0">
+                <a:solidFill>
+                  <a:srgbClr val="1A1A1A"/>
+                </a:solidFill>
+                <a:latin typeface="Georgia" pitchFamily="34" charset="0"/>
+                <a:ea typeface="Georgia" pitchFamily="34" charset="-122"/>
+                <a:cs typeface="Georgia" pitchFamily="34" charset="-120"/>
+              </a:rPr>
+              <a:t>Do the two methods find the same thing or not?</a:t>
+            </a:r>
+            <a:endParaRPr lang="en-US" sz="1200" dirty="0"/>
+          </a:p>
+          <a:p>
+            <a:pPr marL="0" indent="0" algn="l">
               <a:lnSpc>
                 <a:spcPct val="118000"/>
               </a:lnSpc>
               <a:buNone/>
             </a:pPr>
             <a:r>
-              <a:rPr lang="en-US" sz="1200" i="1" dirty="0">
-                <a:solidFill>
-                  <a:srgbClr val="1A1A1A"/>
-                </a:solidFill>
-                <a:latin typeface="Georgia" pitchFamily="34" charset="0"/>
-                <a:ea typeface="Georgia" pitchFamily="34" charset="-122"/>
-                <a:cs typeface="Georgia" pitchFamily="34" charset="-120"/>
-              </a:rPr>
-              <a:t>Do the two methods find the same thing or not?</a:t>
+              <a:rPr lang="en-US" sz="1200" dirty="0">
+                <a:solidFill>
+                  <a:srgbClr val="000000"/>
+                </a:solidFill>
+                <a:latin typeface="Georgia" pitchFamily="34" charset="0"/>
+                <a:ea typeface="Georgia" pitchFamily="34" charset="-122"/>
+                <a:cs typeface="Georgia" pitchFamily="34" charset="-120"/>
+              </a:rPr>
+              <a:t>
+</a:t>
             </a:r>
             <a:endParaRPr lang="en-US" sz="1200" dirty="0"/>
           </a:p>
           <a:p>
-            <a:pPr algn="l" indent="0" marL="0">
+            <a:pPr marL="0" indent="0" algn="l">
               <a:lnSpc>
                 <a:spcPct val="118000"/>
               </a:lnSpc>
               <a:buNone/>
             </a:pPr>
             <a:r>
-              <a:rPr lang="en-US" sz="1200" dirty="0">
-                <a:solidFill>
-                  <a:srgbClr val="000000"/>
-                </a:solidFill>
-                <a:latin typeface="Georgia" pitchFamily="34" charset="0"/>
-                <a:ea typeface="Georgia" pitchFamily="34" charset="-122"/>
-                <a:cs typeface="Georgia" pitchFamily="34" charset="-120"/>
-              </a:rPr>
-              <a:t>
-</a:t>
-            </a:r>
-            <a:endParaRPr lang="en-US" sz="1200" dirty="0"/>
-          </a:p>
-          <a:p>
-            <a:pPr algn="l" indent="0" marL="0">
-              <a:lnSpc>
-                <a:spcPct val="118000"/>
-              </a:lnSpc>
-              <a:buNone/>
-            </a:pPr>
-            <a:r>
               <a:rPr lang="en-US" sz="1200" b="1" dirty="0">
                 <a:solidFill>
                   <a:srgbClr val="5B5B5B"/>
@@ -4186,12 +3941,6 @@
               </a:rPr>
               <a:t>A  </a:t>
             </a:r>
-            <a:pPr algn="l" indent="0" marL="0">
-              <a:lnSpc>
-                <a:spcPct val="118000"/>
-              </a:lnSpc>
-              <a:buNone/>
-            </a:pPr>
             <a:r>
               <a:rPr lang="en-US" sz="1200" dirty="0">
                 <a:solidFill>
@@ -4228,11 +3977,11 @@
           <a:bodyPr wrap="square" lIns="0" tIns="0" rIns="0" bIns="0" rtlCol="0" anchor="ctr"/>
           <a:lstStyle/>
           <a:p>
-            <a:pPr algn="l" indent="0" marL="0">
-              <a:buNone/>
-            </a:pPr>
-            <a:r>
-              <a:rPr lang="en-US" sz="800" spc="100" kern="0" dirty="0">
+            <a:pPr marL="0" indent="0" algn="l">
+              <a:buNone/>
+            </a:pPr>
+            <a:r>
+              <a:rPr lang="en-US" sz="800" kern="0" spc="100" dirty="0">
                 <a:solidFill>
                   <a:srgbClr val="9C9489"/>
                 </a:solidFill>
@@ -4262,6 +4011,7 @@
         <a:solidFill>
           <a:srgbClr val="FAF9F5"/>
         </a:solidFill>
+        <a:effectLst/>
       </p:bgPr>
     </p:bg>
     <p:spTree>
@@ -4299,11 +4049,11 @@
           <a:bodyPr wrap="square" lIns="0" tIns="0" rIns="0" bIns="0" rtlCol="0" anchor="ctr"/>
           <a:lstStyle/>
           <a:p>
-            <a:pPr indent="0" marL="0">
-              <a:buNone/>
-            </a:pPr>
-            <a:r>
-              <a:rPr lang="en-US" sz="1000" b="1" spc="400" kern="0" dirty="0">
+            <a:pPr marL="0" indent="0">
+              <a:buNone/>
+            </a:pPr>
+            <a:r>
+              <a:rPr lang="en-US" sz="1000" b="1" kern="0" spc="400" dirty="0">
                 <a:solidFill>
                   <a:srgbClr val="CC785C"/>
                 </a:solidFill>
@@ -4338,7 +4088,7 @@
           <a:bodyPr wrap="square" lIns="0" tIns="0" rIns="0" bIns="0" rtlCol="0" anchor="t"/>
           <a:lstStyle/>
           <a:p>
-            <a:pPr algn="l" indent="0" marL="0">
+            <a:pPr marL="0" indent="0" algn="l">
               <a:buNone/>
             </a:pPr>
             <a:r>
@@ -4380,18 +4130,25 @@
             <a:prstDash val="solid"/>
           </a:ln>
         </p:spPr>
+        <p:txBody>
+          <a:bodyPr/>
+          <a:lstStyle/>
+          <a:p>
+            <a:endParaRPr lang="en-US"/>
+          </a:p>
+        </p:txBody>
       </p:sp>
       <p:pic>
         <p:nvPicPr>
-          <p:cNvPr id="5" name="Image 0" descr="../results/plots/score_distribution_test.png">    </p:cNvPr>
+          <p:cNvPr id="5" name="Image 0" descr="../results/plots/score_distribution_test.png"/>
           <p:cNvPicPr>
             <a:picLocks noChangeAspect="1"/>
           </p:cNvPicPr>
           <p:nvPr/>
         </p:nvPicPr>
         <p:blipFill>
-          <a:blip r:embed="rId1"/>
-          <a:srcRect l="0" r="0" t="0" b="0"/>
+          <a:blip r:embed="rId3"/>
+          <a:srcRect/>
           <a:stretch/>
         </p:blipFill>
         <p:spPr>
@@ -4425,11 +4182,11 @@
           <a:bodyPr wrap="square" lIns="0" tIns="0" rIns="0" bIns="0" rtlCol="0" anchor="ctr"/>
           <a:lstStyle/>
           <a:p>
-            <a:pPr indent="0" marL="0">
-              <a:buNone/>
-            </a:pPr>
-            <a:r>
-              <a:rPr lang="en-US" sz="1100" b="1" spc="300" kern="0" dirty="0">
+            <a:pPr marL="0" indent="0">
+              <a:buNone/>
+            </a:pPr>
+            <a:r>
+              <a:rPr lang="en-US" sz="1100" b="1" kern="0" spc="300" dirty="0">
                 <a:solidFill>
                   <a:srgbClr val="CC785C"/>
                 </a:solidFill>
@@ -4464,7 +4221,7 @@
           <a:bodyPr wrap="square" lIns="0" tIns="0" rIns="0" bIns="0" rtlCol="0" anchor="t"/>
           <a:lstStyle/>
           <a:p>
-            <a:pPr algn="l" marL="177800" indent="-177800">
+            <a:pPr marL="177800" indent="-177800" algn="l">
               <a:lnSpc>
                 <a:spcPct val="112000"/>
               </a:lnSpc>
@@ -4488,7 +4245,7 @@
             <a:endParaRPr lang="en-US" sz="1300" dirty="0"/>
           </a:p>
           <a:p>
-            <a:pPr algn="l" marL="177800" indent="-177800">
+            <a:pPr marL="177800" indent="-177800" algn="l">
               <a:lnSpc>
                 <a:spcPct val="112000"/>
               </a:lnSpc>
@@ -4512,7 +4269,7 @@
             <a:endParaRPr lang="en-US" sz="1300" dirty="0"/>
           </a:p>
           <a:p>
-            <a:pPr algn="l" marL="177800" indent="-177800">
+            <a:pPr marL="177800" indent="-177800" algn="l">
               <a:lnSpc>
                 <a:spcPct val="112000"/>
               </a:lnSpc>
@@ -4531,7 +4288,7 @@
                 <a:ea typeface="Georgia" pitchFamily="34" charset="-122"/>
                 <a:cs typeface="Georgia" pitchFamily="34" charset="-120"/>
               </a:rPr>
-              <a:t>The two groups barely overlap — clean separation.</a:t>
+              <a:t>The two groups barely overlap , clean separation.</a:t>
             </a:r>
             <a:endParaRPr lang="en-US" sz="1300" dirty="0"/>
           </a:p>
@@ -4556,6 +4313,13 @@
           </a:solidFill>
           <a:ln/>
         </p:spPr>
+        <p:txBody>
+          <a:bodyPr/>
+          <a:lstStyle/>
+          <a:p>
+            <a:endParaRPr lang="en-US"/>
+          </a:p>
+        </p:txBody>
       </p:sp>
       <p:sp>
         <p:nvSpPr>
@@ -4576,6 +4340,13 @@
           </a:solidFill>
           <a:ln/>
         </p:spPr>
+        <p:txBody>
+          <a:bodyPr/>
+          <a:lstStyle/>
+          <a:p>
+            <a:endParaRPr lang="en-US"/>
+          </a:p>
+        </p:txBody>
       </p:sp>
       <p:sp>
         <p:nvSpPr>
@@ -4585,7 +4356,7 @@
         </p:nvSpPr>
         <p:spPr>
           <a:xfrm>
-            <a:off x="7836408" y="4517136"/>
+            <a:off x="7836408" y="4398264"/>
             <a:ext cx="3733495" cy="256032"/>
           </a:xfrm>
           <a:prstGeom prst="rect">
@@ -4598,20 +4369,9 @@
           <a:bodyPr wrap="square" lIns="0" tIns="0" rIns="0" bIns="0" rtlCol="0" anchor="ctr"/>
           <a:lstStyle/>
           <a:p>
-            <a:pPr indent="0" marL="0">
-              <a:buNone/>
-            </a:pPr>
-            <a:r>
-              <a:rPr lang="en-US" sz="1000" b="1" spc="300" kern="0" dirty="0">
-                <a:solidFill>
-                  <a:srgbClr val="CC785C"/>
-                </a:solidFill>
-                <a:latin typeface="Menlo" pitchFamily="34" charset="0"/>
-                <a:ea typeface="Menlo" pitchFamily="34" charset="-122"/>
-                <a:cs typeface="Menlo" pitchFamily="34" charset="-120"/>
-              </a:rPr>
-              <a:t>IF ASKED</a:t>
-            </a:r>
+            <a:pPr marL="0" indent="0">
+              <a:buNone/>
+            </a:pPr>
             <a:endParaRPr lang="en-US" sz="1000" dirty="0"/>
           </a:p>
         </p:txBody>
@@ -4624,7 +4384,7 @@
         </p:nvSpPr>
         <p:spPr>
           <a:xfrm>
-            <a:off x="7836408" y="4800600"/>
+            <a:off x="7836408" y="4466844"/>
             <a:ext cx="3687775" cy="1234440"/>
           </a:xfrm>
           <a:prstGeom prst="rect">
@@ -4637,7 +4397,7 @@
           <a:bodyPr wrap="square" lIns="0" tIns="0" rIns="0" bIns="0" rtlCol="0" anchor="t"/>
           <a:lstStyle/>
           <a:p>
-            <a:pPr algn="l" indent="0" marL="0">
+            <a:pPr marL="0" indent="0" algn="l">
               <a:lnSpc>
                 <a:spcPct val="118000"/>
               </a:lnSpc>
@@ -4654,54 +4414,48 @@
               </a:rPr>
               <a:t>Q  </a:t>
             </a:r>
-            <a:pPr algn="l" indent="0" marL="0">
+            <a:r>
+              <a:rPr lang="en-US" sz="1200" i="1" dirty="0">
+                <a:solidFill>
+                  <a:srgbClr val="1A1A1A"/>
+                </a:solidFill>
+                <a:latin typeface="Georgia" pitchFamily="34" charset="0"/>
+                <a:ea typeface="Georgia" pitchFamily="34" charset="-122"/>
+                <a:cs typeface="Georgia" pitchFamily="34" charset="-120"/>
+              </a:rPr>
+              <a:t>What is a “probe score”?</a:t>
+            </a:r>
+            <a:endParaRPr lang="en-US" sz="1200" dirty="0"/>
+          </a:p>
+          <a:p>
+            <a:pPr marL="0" indent="0" algn="l">
               <a:lnSpc>
                 <a:spcPct val="118000"/>
               </a:lnSpc>
               <a:buNone/>
             </a:pPr>
             <a:r>
-              <a:rPr lang="en-US" sz="1200" i="1" dirty="0">
-                <a:solidFill>
-                  <a:srgbClr val="1A1A1A"/>
-                </a:solidFill>
-                <a:latin typeface="Georgia" pitchFamily="34" charset="0"/>
-                <a:ea typeface="Georgia" pitchFamily="34" charset="-122"/>
-                <a:cs typeface="Georgia" pitchFamily="34" charset="-120"/>
-              </a:rPr>
-              <a:t>What is a “probe score”?</a:t>
+              <a:rPr lang="en-US" sz="1200" dirty="0">
+                <a:solidFill>
+                  <a:srgbClr val="000000"/>
+                </a:solidFill>
+                <a:latin typeface="Georgia" pitchFamily="34" charset="0"/>
+                <a:ea typeface="Georgia" pitchFamily="34" charset="-122"/>
+                <a:cs typeface="Georgia" pitchFamily="34" charset="-120"/>
+              </a:rPr>
+              <a:t>
+</a:t>
             </a:r>
             <a:endParaRPr lang="en-US" sz="1200" dirty="0"/>
           </a:p>
           <a:p>
-            <a:pPr algn="l" indent="0" marL="0">
+            <a:pPr marL="0" indent="0" algn="l">
               <a:lnSpc>
                 <a:spcPct val="118000"/>
               </a:lnSpc>
               <a:buNone/>
             </a:pPr>
             <a:r>
-              <a:rPr lang="en-US" sz="1200" dirty="0">
-                <a:solidFill>
-                  <a:srgbClr val="000000"/>
-                </a:solidFill>
-                <a:latin typeface="Georgia" pitchFamily="34" charset="0"/>
-                <a:ea typeface="Georgia" pitchFamily="34" charset="-122"/>
-                <a:cs typeface="Georgia" pitchFamily="34" charset="-120"/>
-              </a:rPr>
-              <a:t>
-</a:t>
-            </a:r>
-            <a:endParaRPr lang="en-US" sz="1200" dirty="0"/>
-          </a:p>
-          <a:p>
-            <a:pPr algn="l" indent="0" marL="0">
-              <a:lnSpc>
-                <a:spcPct val="118000"/>
-              </a:lnSpc>
-              <a:buNone/>
-            </a:pPr>
-            <a:r>
               <a:rPr lang="en-US" sz="1200" b="1" dirty="0">
                 <a:solidFill>
                   <a:srgbClr val="5B5B5B"/>
@@ -4712,12 +4466,6 @@
               </a:rPr>
               <a:t>A  </a:t>
             </a:r>
-            <a:pPr algn="l" indent="0" marL="0">
-              <a:lnSpc>
-                <a:spcPct val="118000"/>
-              </a:lnSpc>
-              <a:buNone/>
-            </a:pPr>
             <a:r>
               <a:rPr lang="en-US" sz="1200" dirty="0">
                 <a:solidFill>
@@ -4754,11 +4502,11 @@
           <a:bodyPr wrap="square" lIns="0" tIns="0" rIns="0" bIns="0" rtlCol="0" anchor="ctr"/>
           <a:lstStyle/>
           <a:p>
-            <a:pPr algn="l" indent="0" marL="0">
-              <a:buNone/>
-            </a:pPr>
-            <a:r>
-              <a:rPr lang="en-US" sz="800" spc="100" kern="0" dirty="0">
+            <a:pPr marL="0" indent="0" algn="l">
+              <a:buNone/>
+            </a:pPr>
+            <a:r>
+              <a:rPr lang="en-US" sz="800" kern="0" spc="100" dirty="0">
                 <a:solidFill>
                   <a:srgbClr val="9C9489"/>
                 </a:solidFill>
@@ -4788,6 +4536,7 @@
         <a:solidFill>
           <a:srgbClr val="FAF9F5"/>
         </a:solidFill>
+        <a:effectLst/>
       </p:bgPr>
     </p:bg>
     <p:spTree>
@@ -4825,11 +4574,11 @@
           <a:bodyPr wrap="square" lIns="0" tIns="0" rIns="0" bIns="0" rtlCol="0" anchor="ctr"/>
           <a:lstStyle/>
           <a:p>
-            <a:pPr indent="0" marL="0">
-              <a:buNone/>
-            </a:pPr>
-            <a:r>
-              <a:rPr lang="en-US" sz="1000" b="1" spc="400" kern="0" dirty="0">
+            <a:pPr marL="0" indent="0">
+              <a:buNone/>
+            </a:pPr>
+            <a:r>
+              <a:rPr lang="en-US" sz="1000" b="1" kern="0" spc="400" dirty="0">
                 <a:solidFill>
                   <a:srgbClr val="CC785C"/>
                 </a:solidFill>
@@ -4864,7 +4613,7 @@
           <a:bodyPr wrap="square" lIns="0" tIns="0" rIns="0" bIns="0" rtlCol="0" anchor="t"/>
           <a:lstStyle/>
           <a:p>
-            <a:pPr algn="l" indent="0" marL="0">
+            <a:pPr marL="0" indent="0" algn="l">
               <a:buNone/>
             </a:pPr>
             <a:r>
@@ -4906,18 +4655,25 @@
             <a:prstDash val="solid"/>
           </a:ln>
         </p:spPr>
+        <p:txBody>
+          <a:bodyPr/>
+          <a:lstStyle/>
+          <a:p>
+            <a:endParaRPr lang="en-US"/>
+          </a:p>
+        </p:txBody>
       </p:sp>
       <p:pic>
         <p:nvPicPr>
-          <p:cNvPr id="5" name="Image 0" descr="../results/plots/confusion_test.png">    </p:cNvPr>
+          <p:cNvPr id="5" name="Image 0" descr="../results/plots/confusion_test.png"/>
           <p:cNvPicPr>
             <a:picLocks noChangeAspect="1"/>
           </p:cNvPicPr>
           <p:nvPr/>
         </p:nvPicPr>
         <p:blipFill>
-          <a:blip r:embed="rId1"/>
-          <a:srcRect l="0" r="0" t="0" b="0"/>
+          <a:blip r:embed="rId3"/>
+          <a:srcRect/>
           <a:stretch/>
         </p:blipFill>
         <p:spPr>
@@ -4951,11 +4707,11 @@
           <a:bodyPr wrap="square" lIns="0" tIns="0" rIns="0" bIns="0" rtlCol="0" anchor="ctr"/>
           <a:lstStyle/>
           <a:p>
-            <a:pPr indent="0" marL="0">
-              <a:buNone/>
-            </a:pPr>
-            <a:r>
-              <a:rPr lang="en-US" sz="1100" b="1" spc="300" kern="0" dirty="0">
+            <a:pPr marL="0" indent="0">
+              <a:buNone/>
+            </a:pPr>
+            <a:r>
+              <a:rPr lang="en-US" sz="1100" b="1" kern="0" spc="300" dirty="0">
                 <a:solidFill>
                   <a:srgbClr val="CC785C"/>
                 </a:solidFill>
@@ -4990,7 +4746,7 @@
           <a:bodyPr wrap="square" lIns="0" tIns="0" rIns="0" bIns="0" rtlCol="0" anchor="t"/>
           <a:lstStyle/>
           <a:p>
-            <a:pPr algn="l" marL="177800" indent="-177800">
+            <a:pPr marL="177800" indent="-177800" algn="l">
               <a:lnSpc>
                 <a:spcPct val="112000"/>
               </a:lnSpc>
@@ -5014,7 +4770,7 @@
             <a:endParaRPr lang="en-US" sz="1300" dirty="0"/>
           </a:p>
           <a:p>
-            <a:pPr algn="l" marL="177800" indent="-177800">
+            <a:pPr marL="177800" indent="-177800" algn="l">
               <a:lnSpc>
                 <a:spcPct val="112000"/>
               </a:lnSpc>
@@ -5038,7 +4794,7 @@
             <a:endParaRPr lang="en-US" sz="1300" dirty="0"/>
           </a:p>
           <a:p>
-            <a:pPr algn="l" marL="177800" indent="-177800">
+            <a:pPr marL="177800" indent="-177800" algn="l">
               <a:lnSpc>
                 <a:spcPct val="112000"/>
               </a:lnSpc>
@@ -5082,6 +4838,13 @@
           </a:solidFill>
           <a:ln/>
         </p:spPr>
+        <p:txBody>
+          <a:bodyPr/>
+          <a:lstStyle/>
+          <a:p>
+            <a:endParaRPr lang="en-US" dirty="0"/>
+          </a:p>
+        </p:txBody>
       </p:sp>
       <p:sp>
         <p:nvSpPr>
@@ -5102,6 +4865,13 @@
           </a:solidFill>
           <a:ln/>
         </p:spPr>
+        <p:txBody>
+          <a:bodyPr/>
+          <a:lstStyle/>
+          <a:p>
+            <a:endParaRPr lang="en-US"/>
+          </a:p>
+        </p:txBody>
       </p:sp>
       <p:sp>
         <p:nvSpPr>
@@ -5124,20 +4894,9 @@
           <a:bodyPr wrap="square" lIns="0" tIns="0" rIns="0" bIns="0" rtlCol="0" anchor="ctr"/>
           <a:lstStyle/>
           <a:p>
-            <a:pPr indent="0" marL="0">
-              <a:buNone/>
-            </a:pPr>
-            <a:r>
-              <a:rPr lang="en-US" sz="1000" b="1" spc="300" kern="0" dirty="0">
-                <a:solidFill>
-                  <a:srgbClr val="CC785C"/>
-                </a:solidFill>
-                <a:latin typeface="Menlo" pitchFamily="34" charset="0"/>
-                <a:ea typeface="Menlo" pitchFamily="34" charset="-122"/>
-                <a:cs typeface="Menlo" pitchFamily="34" charset="-120"/>
-              </a:rPr>
-              <a:t>IF ASKED</a:t>
-            </a:r>
+            <a:pPr marL="0" indent="0">
+              <a:buNone/>
+            </a:pPr>
             <a:endParaRPr lang="en-US" sz="1000" dirty="0"/>
           </a:p>
         </p:txBody>
@@ -5150,7 +4909,7 @@
         </p:nvSpPr>
         <p:spPr>
           <a:xfrm>
-            <a:off x="7836408" y="4800600"/>
+            <a:off x="7836408" y="4645152"/>
             <a:ext cx="3687775" cy="1234440"/>
           </a:xfrm>
           <a:prstGeom prst="rect">
@@ -5163,7 +4922,7 @@
           <a:bodyPr wrap="square" lIns="0" tIns="0" rIns="0" bIns="0" rtlCol="0" anchor="t"/>
           <a:lstStyle/>
           <a:p>
-            <a:pPr algn="l" indent="0" marL="0">
+            <a:pPr marL="0" indent="0" algn="l">
               <a:lnSpc>
                 <a:spcPct val="118000"/>
               </a:lnSpc>
@@ -5180,54 +4939,48 @@
               </a:rPr>
               <a:t>Q  </a:t>
             </a:r>
-            <a:pPr algn="l" indent="0" marL="0">
+            <a:r>
+              <a:rPr lang="en-US" sz="1200" i="1" dirty="0">
+                <a:solidFill>
+                  <a:srgbClr val="1A1A1A"/>
+                </a:solidFill>
+                <a:latin typeface="Georgia" pitchFamily="34" charset="0"/>
+                <a:ea typeface="Georgia" pitchFamily="34" charset="-122"/>
+                <a:cs typeface="Georgia" pitchFamily="34" charset="-120"/>
+              </a:rPr>
+              <a:t>Is 92% good?</a:t>
+            </a:r>
+            <a:endParaRPr lang="en-US" sz="1200" dirty="0"/>
+          </a:p>
+          <a:p>
+            <a:pPr marL="0" indent="0" algn="l">
               <a:lnSpc>
                 <a:spcPct val="118000"/>
               </a:lnSpc>
               <a:buNone/>
             </a:pPr>
             <a:r>
-              <a:rPr lang="en-US" sz="1200" i="1" dirty="0">
-                <a:solidFill>
-                  <a:srgbClr val="1A1A1A"/>
-                </a:solidFill>
-                <a:latin typeface="Georgia" pitchFamily="34" charset="0"/>
-                <a:ea typeface="Georgia" pitchFamily="34" charset="-122"/>
-                <a:cs typeface="Georgia" pitchFamily="34" charset="-120"/>
-              </a:rPr>
-              <a:t>Is 92% good?</a:t>
+              <a:rPr lang="en-US" sz="1200" dirty="0">
+                <a:solidFill>
+                  <a:srgbClr val="000000"/>
+                </a:solidFill>
+                <a:latin typeface="Georgia" pitchFamily="34" charset="0"/>
+                <a:ea typeface="Georgia" pitchFamily="34" charset="-122"/>
+                <a:cs typeface="Georgia" pitchFamily="34" charset="-120"/>
+              </a:rPr>
+              <a:t>
+</a:t>
             </a:r>
             <a:endParaRPr lang="en-US" sz="1200" dirty="0"/>
           </a:p>
           <a:p>
-            <a:pPr algn="l" indent="0" marL="0">
+            <a:pPr marL="0" indent="0" algn="l">
               <a:lnSpc>
                 <a:spcPct val="118000"/>
               </a:lnSpc>
               <a:buNone/>
             </a:pPr>
             <a:r>
-              <a:rPr lang="en-US" sz="1200" dirty="0">
-                <a:solidFill>
-                  <a:srgbClr val="000000"/>
-                </a:solidFill>
-                <a:latin typeface="Georgia" pitchFamily="34" charset="0"/>
-                <a:ea typeface="Georgia" pitchFamily="34" charset="-122"/>
-                <a:cs typeface="Georgia" pitchFamily="34" charset="-120"/>
-              </a:rPr>
-              <a:t>
-</a:t>
-            </a:r>
-            <a:endParaRPr lang="en-US" sz="1200" dirty="0"/>
-          </a:p>
-          <a:p>
-            <a:pPr algn="l" indent="0" marL="0">
-              <a:lnSpc>
-                <a:spcPct val="118000"/>
-              </a:lnSpc>
-              <a:buNone/>
-            </a:pPr>
-            <a:r>
               <a:rPr lang="en-US" sz="1200" b="1" dirty="0">
                 <a:solidFill>
                   <a:srgbClr val="5B5B5B"/>
@@ -5238,12 +4991,6 @@
               </a:rPr>
               <a:t>A  </a:t>
             </a:r>
-            <a:pPr algn="l" indent="0" marL="0">
-              <a:lnSpc>
-                <a:spcPct val="118000"/>
-              </a:lnSpc>
-              <a:buNone/>
-            </a:pPr>
             <a:r>
               <a:rPr lang="en-US" sz="1200" dirty="0">
                 <a:solidFill>
@@ -5280,11 +5027,11 @@
           <a:bodyPr wrap="square" lIns="0" tIns="0" rIns="0" bIns="0" rtlCol="0" anchor="ctr"/>
           <a:lstStyle/>
           <a:p>
-            <a:pPr algn="l" indent="0" marL="0">
-              <a:buNone/>
-            </a:pPr>
-            <a:r>
-              <a:rPr lang="en-US" sz="800" spc="100" kern="0" dirty="0">
+            <a:pPr marL="0" indent="0" algn="l">
+              <a:buNone/>
+            </a:pPr>
+            <a:r>
+              <a:rPr lang="en-US" sz="800" kern="0" spc="100" dirty="0">
                 <a:solidFill>
                   <a:srgbClr val="9C9489"/>
                 </a:solidFill>
@@ -5314,6 +5061,7 @@
         <a:solidFill>
           <a:srgbClr val="FAF9F5"/>
         </a:solidFill>
+        <a:effectLst/>
       </p:bgPr>
     </p:bg>
     <p:spTree>
@@ -5351,11 +5099,11 @@
           <a:bodyPr wrap="square" lIns="0" tIns="0" rIns="0" bIns="0" rtlCol="0" anchor="ctr"/>
           <a:lstStyle/>
           <a:p>
-            <a:pPr indent="0" marL="0">
-              <a:buNone/>
-            </a:pPr>
-            <a:r>
-              <a:rPr lang="en-US" sz="1000" b="1" spc="400" kern="0" dirty="0">
+            <a:pPr marL="0" indent="0">
+              <a:buNone/>
+            </a:pPr>
+            <a:r>
+              <a:rPr lang="en-US" sz="1000" b="1" kern="0" spc="400" dirty="0">
                 <a:solidFill>
                   <a:srgbClr val="CC785C"/>
                 </a:solidFill>
@@ -5390,7 +5138,7 @@
           <a:bodyPr wrap="square" lIns="0" tIns="0" rIns="0" bIns="0" rtlCol="0" anchor="t"/>
           <a:lstStyle/>
           <a:p>
-            <a:pPr algn="l" indent="0" marL="0">
+            <a:pPr marL="0" indent="0" algn="l">
               <a:buNone/>
             </a:pPr>
             <a:r>
@@ -5432,18 +5180,25 @@
             <a:prstDash val="solid"/>
           </a:ln>
         </p:spPr>
+        <p:txBody>
+          <a:bodyPr/>
+          <a:lstStyle/>
+          <a:p>
+            <a:endParaRPr lang="en-US"/>
+          </a:p>
+        </p:txBody>
       </p:sp>
       <p:pic>
         <p:nvPicPr>
-          <p:cNvPr id="5" name="Image 0" descr="../results/plots/roc_curve_test.png">    </p:cNvPr>
+          <p:cNvPr id="5" name="Image 0" descr="../results/plots/roc_curve_test.png"/>
           <p:cNvPicPr>
             <a:picLocks noChangeAspect="1"/>
           </p:cNvPicPr>
           <p:nvPr/>
         </p:nvPicPr>
         <p:blipFill>
-          <a:blip r:embed="rId1"/>
-          <a:srcRect l="0" r="0" t="0" b="0"/>
+          <a:blip r:embed="rId3"/>
+          <a:srcRect/>
           <a:stretch/>
         </p:blipFill>
         <p:spPr>
@@ -5477,11 +5232,11 @@
           <a:bodyPr wrap="square" lIns="0" tIns="0" rIns="0" bIns="0" rtlCol="0" anchor="ctr"/>
           <a:lstStyle/>
           <a:p>
-            <a:pPr indent="0" marL="0">
-              <a:buNone/>
-            </a:pPr>
-            <a:r>
-              <a:rPr lang="en-US" sz="1100" b="1" spc="300" kern="0" dirty="0">
+            <a:pPr marL="0" indent="0">
+              <a:buNone/>
+            </a:pPr>
+            <a:r>
+              <a:rPr lang="en-US" sz="1100" b="1" kern="0" spc="300" dirty="0">
                 <a:solidFill>
                   <a:srgbClr val="CC785C"/>
                 </a:solidFill>
@@ -5516,7 +5271,7 @@
           <a:bodyPr wrap="square" lIns="0" tIns="0" rIns="0" bIns="0" rtlCol="0" anchor="t"/>
           <a:lstStyle/>
           <a:p>
-            <a:pPr algn="l" marL="177800" indent="-177800">
+            <a:pPr marL="177800" indent="-177800" algn="l">
               <a:lnSpc>
                 <a:spcPct val="112000"/>
               </a:lnSpc>
@@ -5540,7 +5295,7 @@
             <a:endParaRPr lang="en-US" sz="1300" dirty="0"/>
           </a:p>
           <a:p>
-            <a:pPr algn="l" marL="177800" indent="-177800">
+            <a:pPr marL="177800" indent="-177800" algn="l">
               <a:lnSpc>
                 <a:spcPct val="112000"/>
               </a:lnSpc>
@@ -5584,6 +5339,13 @@
           </a:solidFill>
           <a:ln/>
         </p:spPr>
+        <p:txBody>
+          <a:bodyPr/>
+          <a:lstStyle/>
+          <a:p>
+            <a:endParaRPr lang="en-US" dirty="0"/>
+          </a:p>
+        </p:txBody>
       </p:sp>
       <p:sp>
         <p:nvSpPr>
@@ -5604,6 +5366,13 @@
           </a:solidFill>
           <a:ln/>
         </p:spPr>
+        <p:txBody>
+          <a:bodyPr/>
+          <a:lstStyle/>
+          <a:p>
+            <a:endParaRPr lang="en-US"/>
+          </a:p>
+        </p:txBody>
       </p:sp>
       <p:sp>
         <p:nvSpPr>
@@ -5626,20 +5395,9 @@
           <a:bodyPr wrap="square" lIns="0" tIns="0" rIns="0" bIns="0" rtlCol="0" anchor="ctr"/>
           <a:lstStyle/>
           <a:p>
-            <a:pPr indent="0" marL="0">
-              <a:buNone/>
-            </a:pPr>
-            <a:r>
-              <a:rPr lang="en-US" sz="1000" b="1" spc="300" kern="0" dirty="0">
-                <a:solidFill>
-                  <a:srgbClr val="CC785C"/>
-                </a:solidFill>
-                <a:latin typeface="Menlo" pitchFamily="34" charset="0"/>
-                <a:ea typeface="Menlo" pitchFamily="34" charset="-122"/>
-                <a:cs typeface="Menlo" pitchFamily="34" charset="-120"/>
-              </a:rPr>
-              <a:t>IF ASKED</a:t>
-            </a:r>
+            <a:pPr marL="0" indent="0">
+              <a:buNone/>
+            </a:pPr>
             <a:endParaRPr lang="en-US" sz="1000" dirty="0"/>
           </a:p>
         </p:txBody>
@@ -5652,7 +5410,7 @@
         </p:nvSpPr>
         <p:spPr>
           <a:xfrm>
-            <a:off x="7836408" y="4800600"/>
+            <a:off x="7836408" y="4539996"/>
             <a:ext cx="3687775" cy="1234440"/>
           </a:xfrm>
           <a:prstGeom prst="rect">
@@ -5665,7 +5423,7 @@
           <a:bodyPr wrap="square" lIns="0" tIns="0" rIns="0" bIns="0" rtlCol="0" anchor="t"/>
           <a:lstStyle/>
           <a:p>
-            <a:pPr algn="l" indent="0" marL="0">
+            <a:pPr marL="0" indent="0" algn="l">
               <a:lnSpc>
                 <a:spcPct val="118000"/>
               </a:lnSpc>
@@ -5682,54 +5440,48 @@
               </a:rPr>
               <a:t>Q  </a:t>
             </a:r>
-            <a:pPr algn="l" indent="0" marL="0">
+            <a:r>
+              <a:rPr lang="en-US" sz="1200" i="1" dirty="0">
+                <a:solidFill>
+                  <a:srgbClr val="1A1A1A"/>
+                </a:solidFill>
+                <a:latin typeface="Georgia" pitchFamily="34" charset="0"/>
+                <a:ea typeface="Georgia" pitchFamily="34" charset="-122"/>
+                <a:cs typeface="Georgia" pitchFamily="34" charset="-120"/>
+              </a:rPr>
+              <a:t>What is AUC?</a:t>
+            </a:r>
+            <a:endParaRPr lang="en-US" sz="1200" dirty="0"/>
+          </a:p>
+          <a:p>
+            <a:pPr marL="0" indent="0" algn="l">
               <a:lnSpc>
                 <a:spcPct val="118000"/>
               </a:lnSpc>
               <a:buNone/>
             </a:pPr>
             <a:r>
-              <a:rPr lang="en-US" sz="1200" i="1" dirty="0">
-                <a:solidFill>
-                  <a:srgbClr val="1A1A1A"/>
-                </a:solidFill>
-                <a:latin typeface="Georgia" pitchFamily="34" charset="0"/>
-                <a:ea typeface="Georgia" pitchFamily="34" charset="-122"/>
-                <a:cs typeface="Georgia" pitchFamily="34" charset="-120"/>
-              </a:rPr>
-              <a:t>What is AUC?</a:t>
+              <a:rPr lang="en-US" sz="1200" dirty="0">
+                <a:solidFill>
+                  <a:srgbClr val="000000"/>
+                </a:solidFill>
+                <a:latin typeface="Georgia" pitchFamily="34" charset="0"/>
+                <a:ea typeface="Georgia" pitchFamily="34" charset="-122"/>
+                <a:cs typeface="Georgia" pitchFamily="34" charset="-120"/>
+              </a:rPr>
+              <a:t>
+</a:t>
             </a:r>
             <a:endParaRPr lang="en-US" sz="1200" dirty="0"/>
           </a:p>
           <a:p>
-            <a:pPr algn="l" indent="0" marL="0">
+            <a:pPr marL="0" indent="0" algn="l">
               <a:lnSpc>
                 <a:spcPct val="118000"/>
               </a:lnSpc>
               <a:buNone/>
             </a:pPr>
             <a:r>
-              <a:rPr lang="en-US" sz="1200" dirty="0">
-                <a:solidFill>
-                  <a:srgbClr val="000000"/>
-                </a:solidFill>
-                <a:latin typeface="Georgia" pitchFamily="34" charset="0"/>
-                <a:ea typeface="Georgia" pitchFamily="34" charset="-122"/>
-                <a:cs typeface="Georgia" pitchFamily="34" charset="-120"/>
-              </a:rPr>
-              <a:t>
-</a:t>
-            </a:r>
-            <a:endParaRPr lang="en-US" sz="1200" dirty="0"/>
-          </a:p>
-          <a:p>
-            <a:pPr algn="l" indent="0" marL="0">
-              <a:lnSpc>
-                <a:spcPct val="118000"/>
-              </a:lnSpc>
-              <a:buNone/>
-            </a:pPr>
-            <a:r>
               <a:rPr lang="en-US" sz="1200" b="1" dirty="0">
                 <a:solidFill>
                   <a:srgbClr val="5B5B5B"/>
@@ -5740,12 +5492,6 @@
               </a:rPr>
               <a:t>A  </a:t>
             </a:r>
-            <a:pPr algn="l" indent="0" marL="0">
-              <a:lnSpc>
-                <a:spcPct val="118000"/>
-              </a:lnSpc>
-              <a:buNone/>
-            </a:pPr>
             <a:r>
               <a:rPr lang="en-US" sz="1200" dirty="0">
                 <a:solidFill>
@@ -5782,11 +5528,11 @@
           <a:bodyPr wrap="square" lIns="0" tIns="0" rIns="0" bIns="0" rtlCol="0" anchor="ctr"/>
           <a:lstStyle/>
           <a:p>
-            <a:pPr algn="l" indent="0" marL="0">
-              <a:buNone/>
-            </a:pPr>
-            <a:r>
-              <a:rPr lang="en-US" sz="800" spc="100" kern="0" dirty="0">
+            <a:pPr marL="0" indent="0" algn="l">
+              <a:buNone/>
+            </a:pPr>
+            <a:r>
+              <a:rPr lang="en-US" sz="800" kern="0" spc="100" dirty="0">
                 <a:solidFill>
                   <a:srgbClr val="9C9489"/>
                 </a:solidFill>
@@ -5816,6 +5562,7 @@
         <a:solidFill>
           <a:srgbClr val="FAF9F5"/>
         </a:solidFill>
+        <a:effectLst/>
       </p:bgPr>
     </p:bg>
     <p:spTree>
@@ -5853,11 +5600,11 @@
           <a:bodyPr wrap="square" lIns="0" tIns="0" rIns="0" bIns="0" rtlCol="0" anchor="ctr"/>
           <a:lstStyle/>
           <a:p>
-            <a:pPr indent="0" marL="0">
-              <a:buNone/>
-            </a:pPr>
-            <a:r>
-              <a:rPr lang="en-US" sz="1000" b="1" spc="400" kern="0" dirty="0">
+            <a:pPr marL="0" indent="0">
+              <a:buNone/>
+            </a:pPr>
+            <a:r>
+              <a:rPr lang="en-US" sz="1000" b="1" kern="0" spc="400" dirty="0">
                 <a:solidFill>
                   <a:srgbClr val="CC785C"/>
                 </a:solidFill>
@@ -5892,7 +5639,7 @@
           <a:bodyPr wrap="square" lIns="0" tIns="0" rIns="0" bIns="0" rtlCol="0" anchor="t"/>
           <a:lstStyle/>
           <a:p>
-            <a:pPr algn="l" indent="0" marL="0">
+            <a:pPr marL="0" indent="0" algn="l">
               <a:buNone/>
             </a:pPr>
             <a:r>
@@ -5934,18 +5681,25 @@
             <a:prstDash val="solid"/>
           </a:ln>
         </p:spPr>
+        <p:txBody>
+          <a:bodyPr/>
+          <a:lstStyle/>
+          <a:p>
+            <a:endParaRPr lang="en-US"/>
+          </a:p>
+        </p:txBody>
       </p:sp>
       <p:pic>
         <p:nvPicPr>
-          <p:cNvPr id="5" name="Image 0" descr="../results/plots/layer_sweep_accuracy.png">    </p:cNvPr>
+          <p:cNvPr id="5" name="Image 0" descr="../results/plots/layer_sweep_accuracy.png"/>
           <p:cNvPicPr>
             <a:picLocks noChangeAspect="1"/>
           </p:cNvPicPr>
           <p:nvPr/>
         </p:nvPicPr>
         <p:blipFill>
-          <a:blip r:embed="rId1"/>
-          <a:srcRect l="0" r="0" t="0" b="0"/>
+          <a:blip r:embed="rId3"/>
+          <a:srcRect/>
           <a:stretch/>
         </p:blipFill>
         <p:spPr>
@@ -5979,11 +5733,11 @@
           <a:bodyPr wrap="square" lIns="0" tIns="0" rIns="0" bIns="0" rtlCol="0" anchor="ctr"/>
           <a:lstStyle/>
           <a:p>
-            <a:pPr indent="0" marL="0">
-              <a:buNone/>
-            </a:pPr>
-            <a:r>
-              <a:rPr lang="en-US" sz="1100" b="1" spc="300" kern="0" dirty="0">
+            <a:pPr marL="0" indent="0">
+              <a:buNone/>
+            </a:pPr>
+            <a:r>
+              <a:rPr lang="en-US" sz="1100" b="1" kern="0" spc="300" dirty="0">
                 <a:solidFill>
                   <a:srgbClr val="CC785C"/>
                 </a:solidFill>
@@ -6018,7 +5772,7 @@
           <a:bodyPr wrap="square" lIns="0" tIns="0" rIns="0" bIns="0" rtlCol="0" anchor="t"/>
           <a:lstStyle/>
           <a:p>
-            <a:pPr algn="l" marL="177800" indent="-177800">
+            <a:pPr marL="177800" indent="-177800" algn="l">
               <a:lnSpc>
                 <a:spcPct val="112000"/>
               </a:lnSpc>
@@ -6042,7 +5796,7 @@
             <a:endParaRPr lang="en-US" sz="1300" dirty="0"/>
           </a:p>
           <a:p>
-            <a:pPr algn="l" marL="177800" indent="-177800">
+            <a:pPr marL="177800" indent="-177800" algn="l">
               <a:lnSpc>
                 <a:spcPct val="112000"/>
               </a:lnSpc>
@@ -6066,7 +5820,7 @@
             <a:endParaRPr lang="en-US" sz="1300" dirty="0"/>
           </a:p>
           <a:p>
-            <a:pPr algn="l" marL="177800" indent="-177800">
+            <a:pPr marL="177800" indent="-177800" algn="l">
               <a:lnSpc>
                 <a:spcPct val="112000"/>
               </a:lnSpc>
@@ -6110,6 +5864,13 @@
           </a:solidFill>
           <a:ln/>
         </p:spPr>
+        <p:txBody>
+          <a:bodyPr/>
+          <a:lstStyle/>
+          <a:p>
+            <a:endParaRPr lang="en-US"/>
+          </a:p>
+        </p:txBody>
       </p:sp>
       <p:sp>
         <p:nvSpPr>
@@ -6130,6 +5891,13 @@
           </a:solidFill>
           <a:ln/>
         </p:spPr>
+        <p:txBody>
+          <a:bodyPr/>
+          <a:lstStyle/>
+          <a:p>
+            <a:endParaRPr lang="en-US"/>
+          </a:p>
+        </p:txBody>
       </p:sp>
       <p:sp>
         <p:nvSpPr>
@@ -6152,20 +5920,9 @@
           <a:bodyPr wrap="square" lIns="0" tIns="0" rIns="0" bIns="0" rtlCol="0" anchor="ctr"/>
           <a:lstStyle/>
           <a:p>
-            <a:pPr indent="0" marL="0">
-              <a:buNone/>
-            </a:pPr>
-            <a:r>
-              <a:rPr lang="en-US" sz="1000" b="1" spc="300" kern="0" dirty="0">
-                <a:solidFill>
-                  <a:srgbClr val="CC785C"/>
-                </a:solidFill>
-                <a:latin typeface="Menlo" pitchFamily="34" charset="0"/>
-                <a:ea typeface="Menlo" pitchFamily="34" charset="-122"/>
-                <a:cs typeface="Menlo" pitchFamily="34" charset="-120"/>
-              </a:rPr>
-              <a:t>IF ASKED</a:t>
-            </a:r>
+            <a:pPr marL="0" indent="0">
+              <a:buNone/>
+            </a:pPr>
             <a:endParaRPr lang="en-US" sz="1000" dirty="0"/>
           </a:p>
         </p:txBody>
@@ -6178,7 +5935,7 @@
         </p:nvSpPr>
         <p:spPr>
           <a:xfrm>
-            <a:off x="7836408" y="4800600"/>
+            <a:off x="7859267" y="4539996"/>
             <a:ext cx="3687775" cy="1234440"/>
           </a:xfrm>
           <a:prstGeom prst="rect">
@@ -6191,7 +5948,7 @@
           <a:bodyPr wrap="square" lIns="0" tIns="0" rIns="0" bIns="0" rtlCol="0" anchor="t"/>
           <a:lstStyle/>
           <a:p>
-            <a:pPr algn="l" indent="0" marL="0">
+            <a:pPr marL="0" indent="0" algn="l">
               <a:lnSpc>
                 <a:spcPct val="118000"/>
               </a:lnSpc>
@@ -6208,54 +5965,48 @@
               </a:rPr>
               <a:t>Q  </a:t>
             </a:r>
-            <a:pPr algn="l" indent="0" marL="0">
+            <a:r>
+              <a:rPr lang="en-US" sz="1200" i="1" dirty="0">
+                <a:solidFill>
+                  <a:srgbClr val="1A1A1A"/>
+                </a:solidFill>
+                <a:latin typeface="Georgia" pitchFamily="34" charset="0"/>
+                <a:ea typeface="Georgia" pitchFamily="34" charset="-122"/>
+                <a:cs typeface="Georgia" pitchFamily="34" charset="-120"/>
+              </a:rPr>
+              <a:t>Why did you pick layer 12 specifically?</a:t>
+            </a:r>
+            <a:endParaRPr lang="en-US" sz="1200" dirty="0"/>
+          </a:p>
+          <a:p>
+            <a:pPr marL="0" indent="0" algn="l">
               <a:lnSpc>
                 <a:spcPct val="118000"/>
               </a:lnSpc>
               <a:buNone/>
             </a:pPr>
             <a:r>
-              <a:rPr lang="en-US" sz="1200" i="1" dirty="0">
-                <a:solidFill>
-                  <a:srgbClr val="1A1A1A"/>
-                </a:solidFill>
-                <a:latin typeface="Georgia" pitchFamily="34" charset="0"/>
-                <a:ea typeface="Georgia" pitchFamily="34" charset="-122"/>
-                <a:cs typeface="Georgia" pitchFamily="34" charset="-120"/>
-              </a:rPr>
-              <a:t>Why did you pick layer 12 specifically?</a:t>
+              <a:rPr lang="en-US" sz="1200" dirty="0">
+                <a:solidFill>
+                  <a:srgbClr val="000000"/>
+                </a:solidFill>
+                <a:latin typeface="Georgia" pitchFamily="34" charset="0"/>
+                <a:ea typeface="Georgia" pitchFamily="34" charset="-122"/>
+                <a:cs typeface="Georgia" pitchFamily="34" charset="-120"/>
+              </a:rPr>
+              <a:t>
+</a:t>
             </a:r>
             <a:endParaRPr lang="en-US" sz="1200" dirty="0"/>
           </a:p>
           <a:p>
-            <a:pPr algn="l" indent="0" marL="0">
+            <a:pPr marL="0" indent="0" algn="l">
               <a:lnSpc>
                 <a:spcPct val="118000"/>
               </a:lnSpc>
               <a:buNone/>
             </a:pPr>
             <a:r>
-              <a:rPr lang="en-US" sz="1200" dirty="0">
-                <a:solidFill>
-                  <a:srgbClr val="000000"/>
-                </a:solidFill>
-                <a:latin typeface="Georgia" pitchFamily="34" charset="0"/>
-                <a:ea typeface="Georgia" pitchFamily="34" charset="-122"/>
-                <a:cs typeface="Georgia" pitchFamily="34" charset="-120"/>
-              </a:rPr>
-              <a:t>
-</a:t>
-            </a:r>
-            <a:endParaRPr lang="en-US" sz="1200" dirty="0"/>
-          </a:p>
-          <a:p>
-            <a:pPr algn="l" indent="0" marL="0">
-              <a:lnSpc>
-                <a:spcPct val="118000"/>
-              </a:lnSpc>
-              <a:buNone/>
-            </a:pPr>
-            <a:r>
               <a:rPr lang="en-US" sz="1200" b="1" dirty="0">
                 <a:solidFill>
                   <a:srgbClr val="5B5B5B"/>
@@ -6266,12 +6017,6 @@
               </a:rPr>
               <a:t>A  </a:t>
             </a:r>
-            <a:pPr algn="l" indent="0" marL="0">
-              <a:lnSpc>
-                <a:spcPct val="118000"/>
-              </a:lnSpc>
-              <a:buNone/>
-            </a:pPr>
             <a:r>
               <a:rPr lang="en-US" sz="1200" dirty="0">
                 <a:solidFill>
@@ -6308,11 +6053,11 @@
           <a:bodyPr wrap="square" lIns="0" tIns="0" rIns="0" bIns="0" rtlCol="0" anchor="ctr"/>
           <a:lstStyle/>
           <a:p>
-            <a:pPr algn="l" indent="0" marL="0">
-              <a:buNone/>
-            </a:pPr>
-            <a:r>
-              <a:rPr lang="en-US" sz="800" spc="100" kern="0" dirty="0">
+            <a:pPr marL="0" indent="0" algn="l">
+              <a:buNone/>
+            </a:pPr>
+            <a:r>
+              <a:rPr lang="en-US" sz="800" kern="0" spc="100" dirty="0">
                 <a:solidFill>
                   <a:srgbClr val="9C9489"/>
                 </a:solidFill>
@@ -6342,6 +6087,7 @@
         <a:solidFill>
           <a:srgbClr val="FAF9F5"/>
         </a:solidFill>
+        <a:effectLst/>
       </p:bgPr>
     </p:bg>
     <p:spTree>
@@ -6379,11 +6125,11 @@
           <a:bodyPr wrap="square" lIns="0" tIns="0" rIns="0" bIns="0" rtlCol="0" anchor="ctr"/>
           <a:lstStyle/>
           <a:p>
-            <a:pPr indent="0" marL="0">
-              <a:buNone/>
-            </a:pPr>
-            <a:r>
-              <a:rPr lang="en-US" sz="1000" b="1" spc="400" kern="0" dirty="0">
+            <a:pPr marL="0" indent="0">
+              <a:buNone/>
+            </a:pPr>
+            <a:r>
+              <a:rPr lang="en-US" sz="1000" b="1" kern="0" spc="400" dirty="0">
                 <a:solidFill>
                   <a:srgbClr val="CC785C"/>
                 </a:solidFill>
@@ -6418,7 +6164,7 @@
           <a:bodyPr wrap="square" lIns="0" tIns="0" rIns="0" bIns="0" rtlCol="0" anchor="t"/>
           <a:lstStyle/>
           <a:p>
-            <a:pPr algn="l" indent="0" marL="0">
+            <a:pPr marL="0" indent="0" algn="l">
               <a:buNone/>
             </a:pPr>
             <a:r>
@@ -6460,18 +6206,25 @@
             <a:prstDash val="solid"/>
           </a:ln>
         </p:spPr>
+        <p:txBody>
+          <a:bodyPr/>
+          <a:lstStyle/>
+          <a:p>
+            <a:endParaRPr lang="en-US"/>
+          </a:p>
+        </p:txBody>
       </p:sp>
       <p:pic>
         <p:nvPicPr>
-          <p:cNvPr id="5" name="Image 0" descr="../results/plots/all_feature_correlations_hist.png">    </p:cNvPr>
+          <p:cNvPr id="5" name="Image 0" descr="../results/plots/all_feature_correlations_hist.png"/>
           <p:cNvPicPr>
             <a:picLocks noChangeAspect="1"/>
           </p:cNvPicPr>
           <p:nvPr/>
         </p:nvPicPr>
         <p:blipFill>
-          <a:blip r:embed="rId1"/>
-          <a:srcRect l="0" r="0" t="0" b="0"/>
+          <a:blip r:embed="rId3"/>
+          <a:srcRect/>
           <a:stretch/>
         </p:blipFill>
         <p:spPr>
@@ -6505,11 +6258,11 @@
           <a:bodyPr wrap="square" lIns="0" tIns="0" rIns="0" bIns="0" rtlCol="0" anchor="ctr"/>
           <a:lstStyle/>
           <a:p>
-            <a:pPr indent="0" marL="0">
-              <a:buNone/>
-            </a:pPr>
-            <a:r>
-              <a:rPr lang="en-US" sz="1100" b="1" spc="300" kern="0" dirty="0">
+            <a:pPr marL="0" indent="0">
+              <a:buNone/>
+            </a:pPr>
+            <a:r>
+              <a:rPr lang="en-US" sz="1100" b="1" kern="0" spc="300" dirty="0">
                 <a:solidFill>
                   <a:srgbClr val="CC785C"/>
                 </a:solidFill>
@@ -6544,7 +6297,7 @@
           <a:bodyPr wrap="square" lIns="0" tIns="0" rIns="0" bIns="0" rtlCol="0" anchor="t"/>
           <a:lstStyle/>
           <a:p>
-            <a:pPr algn="l" marL="177800" indent="-177800">
+            <a:pPr marL="177800" indent="-177800" algn="l">
               <a:lnSpc>
                 <a:spcPct val="112000"/>
               </a:lnSpc>
@@ -6568,7 +6321,7 @@
             <a:endParaRPr lang="en-US" sz="1300" dirty="0"/>
           </a:p>
           <a:p>
-            <a:pPr algn="l" marL="177800" indent="-177800">
+            <a:pPr marL="177800" indent="-177800" algn="l">
               <a:lnSpc>
                 <a:spcPct val="112000"/>
               </a:lnSpc>
@@ -6592,7 +6345,7 @@
             <a:endParaRPr lang="en-US" sz="1300" dirty="0"/>
           </a:p>
           <a:p>
-            <a:pPr algn="l" marL="177800" indent="-177800">
+            <a:pPr marL="177800" indent="-177800" algn="l">
               <a:lnSpc>
                 <a:spcPct val="112000"/>
               </a:lnSpc>
@@ -6636,6 +6389,13 @@
           </a:solidFill>
           <a:ln/>
         </p:spPr>
+        <p:txBody>
+          <a:bodyPr/>
+          <a:lstStyle/>
+          <a:p>
+            <a:endParaRPr lang="en-US"/>
+          </a:p>
+        </p:txBody>
       </p:sp>
       <p:sp>
         <p:nvSpPr>
@@ -6656,6 +6416,13 @@
           </a:solidFill>
           <a:ln/>
         </p:spPr>
+        <p:txBody>
+          <a:bodyPr/>
+          <a:lstStyle/>
+          <a:p>
+            <a:endParaRPr lang="en-US"/>
+          </a:p>
+        </p:txBody>
       </p:sp>
       <p:sp>
         <p:nvSpPr>
@@ -6678,20 +6445,9 @@
           <a:bodyPr wrap="square" lIns="0" tIns="0" rIns="0" bIns="0" rtlCol="0" anchor="ctr"/>
           <a:lstStyle/>
           <a:p>
-            <a:pPr indent="0" marL="0">
-              <a:buNone/>
-            </a:pPr>
-            <a:r>
-              <a:rPr lang="en-US" sz="1000" b="1" spc="300" kern="0" dirty="0">
-                <a:solidFill>
-                  <a:srgbClr val="CC785C"/>
-                </a:solidFill>
-                <a:latin typeface="Menlo" pitchFamily="34" charset="0"/>
-                <a:ea typeface="Menlo" pitchFamily="34" charset="-122"/>
-                <a:cs typeface="Menlo" pitchFamily="34" charset="-120"/>
-              </a:rPr>
-              <a:t>IF ASKED</a:t>
-            </a:r>
+            <a:pPr marL="0" indent="0">
+              <a:buNone/>
+            </a:pPr>
             <a:endParaRPr lang="en-US" sz="1000" dirty="0"/>
           </a:p>
         </p:txBody>
@@ -6704,7 +6460,7 @@
         </p:nvSpPr>
         <p:spPr>
           <a:xfrm>
-            <a:off x="7836408" y="4800600"/>
+            <a:off x="7840979" y="4539996"/>
             <a:ext cx="3687775" cy="1234440"/>
           </a:xfrm>
           <a:prstGeom prst="rect">
@@ -6717,7 +6473,7 @@
           <a:bodyPr wrap="square" lIns="0" tIns="0" rIns="0" bIns="0" rtlCol="0" anchor="t"/>
           <a:lstStyle/>
           <a:p>
-            <a:pPr algn="l" indent="0" marL="0">
+            <a:pPr marL="0" indent="0" algn="l">
               <a:lnSpc>
                 <a:spcPct val="118000"/>
               </a:lnSpc>
@@ -6734,54 +6490,48 @@
               </a:rPr>
               <a:t>Q  </a:t>
             </a:r>
-            <a:pPr algn="l" indent="0" marL="0">
+            <a:r>
+              <a:rPr lang="en-US" sz="1200" i="1" dirty="0">
+                <a:solidFill>
+                  <a:srgbClr val="1A1A1A"/>
+                </a:solidFill>
+                <a:latin typeface="Georgia" pitchFamily="34" charset="0"/>
+                <a:ea typeface="Georgia" pitchFamily="34" charset="-122"/>
+                <a:cs typeface="Georgia" pitchFamily="34" charset="-120"/>
+              </a:rPr>
+              <a:t>How did you find the sentiment feature?</a:t>
+            </a:r>
+            <a:endParaRPr lang="en-US" sz="1200" dirty="0"/>
+          </a:p>
+          <a:p>
+            <a:pPr marL="0" indent="0" algn="l">
               <a:lnSpc>
                 <a:spcPct val="118000"/>
               </a:lnSpc>
               <a:buNone/>
             </a:pPr>
             <a:r>
-              <a:rPr lang="en-US" sz="1200" i="1" dirty="0">
-                <a:solidFill>
-                  <a:srgbClr val="1A1A1A"/>
-                </a:solidFill>
-                <a:latin typeface="Georgia" pitchFamily="34" charset="0"/>
-                <a:ea typeface="Georgia" pitchFamily="34" charset="-122"/>
-                <a:cs typeface="Georgia" pitchFamily="34" charset="-120"/>
-              </a:rPr>
-              <a:t>How did you find the sentiment feature?</a:t>
+              <a:rPr lang="en-US" sz="1200" dirty="0">
+                <a:solidFill>
+                  <a:srgbClr val="000000"/>
+                </a:solidFill>
+                <a:latin typeface="Georgia" pitchFamily="34" charset="0"/>
+                <a:ea typeface="Georgia" pitchFamily="34" charset="-122"/>
+                <a:cs typeface="Georgia" pitchFamily="34" charset="-120"/>
+              </a:rPr>
+              <a:t>
+</a:t>
             </a:r>
             <a:endParaRPr lang="en-US" sz="1200" dirty="0"/>
           </a:p>
           <a:p>
-            <a:pPr algn="l" indent="0" marL="0">
+            <a:pPr marL="0" indent="0" algn="l">
               <a:lnSpc>
                 <a:spcPct val="118000"/>
               </a:lnSpc>
               <a:buNone/>
             </a:pPr>
             <a:r>
-              <a:rPr lang="en-US" sz="1200" dirty="0">
-                <a:solidFill>
-                  <a:srgbClr val="000000"/>
-                </a:solidFill>
-                <a:latin typeface="Georgia" pitchFamily="34" charset="0"/>
-                <a:ea typeface="Georgia" pitchFamily="34" charset="-122"/>
-                <a:cs typeface="Georgia" pitchFamily="34" charset="-120"/>
-              </a:rPr>
-              <a:t>
-</a:t>
-            </a:r>
-            <a:endParaRPr lang="en-US" sz="1200" dirty="0"/>
-          </a:p>
-          <a:p>
-            <a:pPr algn="l" indent="0" marL="0">
-              <a:lnSpc>
-                <a:spcPct val="118000"/>
-              </a:lnSpc>
-              <a:buNone/>
-            </a:pPr>
-            <a:r>
               <a:rPr lang="en-US" sz="1200" b="1" dirty="0">
                 <a:solidFill>
                   <a:srgbClr val="5B5B5B"/>
@@ -6792,12 +6542,6 @@
               </a:rPr>
               <a:t>A  </a:t>
             </a:r>
-            <a:pPr algn="l" indent="0" marL="0">
-              <a:lnSpc>
-                <a:spcPct val="118000"/>
-              </a:lnSpc>
-              <a:buNone/>
-            </a:pPr>
             <a:r>
               <a:rPr lang="en-US" sz="1200" dirty="0">
                 <a:solidFill>
@@ -6834,11 +6578,11 @@
           <a:bodyPr wrap="square" lIns="0" tIns="0" rIns="0" bIns="0" rtlCol="0" anchor="ctr"/>
           <a:lstStyle/>
           <a:p>
-            <a:pPr algn="l" indent="0" marL="0">
-              <a:buNone/>
-            </a:pPr>
-            <a:r>
-              <a:rPr lang="en-US" sz="800" spc="100" kern="0" dirty="0">
+            <a:pPr marL="0" indent="0" algn="l">
+              <a:buNone/>
+            </a:pPr>
+            <a:r>
+              <a:rPr lang="en-US" sz="800" kern="0" spc="100" dirty="0">
                 <a:solidFill>
                   <a:srgbClr val="9C9489"/>
                 </a:solidFill>
@@ -6868,6 +6612,7 @@
         <a:solidFill>
           <a:srgbClr val="FAF9F5"/>
         </a:solidFill>
+        <a:effectLst/>
       </p:bgPr>
     </p:bg>
     <p:spTree>
@@ -6905,11 +6650,11 @@
           <a:bodyPr wrap="square" lIns="0" tIns="0" rIns="0" bIns="0" rtlCol="0" anchor="ctr"/>
           <a:lstStyle/>
           <a:p>
-            <a:pPr indent="0" marL="0">
-              <a:buNone/>
-            </a:pPr>
-            <a:r>
-              <a:rPr lang="en-US" sz="1000" b="1" spc="400" kern="0" dirty="0">
+            <a:pPr marL="0" indent="0">
+              <a:buNone/>
+            </a:pPr>
+            <a:r>
+              <a:rPr lang="en-US" sz="1000" b="1" kern="0" spc="400" dirty="0">
                 <a:solidFill>
                   <a:srgbClr val="CC785C"/>
                 </a:solidFill>
@@ -6944,7 +6689,7 @@
           <a:bodyPr wrap="square" lIns="0" tIns="0" rIns="0" bIns="0" rtlCol="0" anchor="t"/>
           <a:lstStyle/>
           <a:p>
-            <a:pPr algn="l" indent="0" marL="0">
+            <a:pPr marL="0" indent="0" algn="l">
               <a:buNone/>
             </a:pPr>
             <a:r>
@@ -6986,18 +6731,25 @@
             <a:prstDash val="solid"/>
           </a:ln>
         </p:spPr>
+        <p:txBody>
+          <a:bodyPr/>
+          <a:lstStyle/>
+          <a:p>
+            <a:endParaRPr lang="en-US"/>
+          </a:p>
+        </p:txBody>
       </p:sp>
       <p:pic>
         <p:nvPicPr>
-          <p:cNvPr id="5" name="Image 0" descr="../results/plots/sae_feature_correlations.png">    </p:cNvPr>
+          <p:cNvPr id="5" name="Image 0" descr="../results/plots/sae_feature_correlations.png"/>
           <p:cNvPicPr>
             <a:picLocks noChangeAspect="1"/>
           </p:cNvPicPr>
           <p:nvPr/>
         </p:nvPicPr>
         <p:blipFill>
-          <a:blip r:embed="rId1"/>
-          <a:srcRect l="0" r="0" t="0" b="0"/>
+          <a:blip r:embed="rId3"/>
+          <a:srcRect/>
           <a:stretch/>
         </p:blipFill>
         <p:spPr>
@@ -7031,11 +6783,11 @@
           <a:bodyPr wrap="square" lIns="0" tIns="0" rIns="0" bIns="0" rtlCol="0" anchor="ctr"/>
           <a:lstStyle/>
           <a:p>
-            <a:pPr indent="0" marL="0">
-              <a:buNone/>
-            </a:pPr>
-            <a:r>
-              <a:rPr lang="en-US" sz="1100" b="1" spc="300" kern="0" dirty="0">
+            <a:pPr marL="0" indent="0">
+              <a:buNone/>
+            </a:pPr>
+            <a:r>
+              <a:rPr lang="en-US" sz="1100" b="1" kern="0" spc="300" dirty="0">
                 <a:solidFill>
                   <a:srgbClr val="CC785C"/>
                 </a:solidFill>
@@ -7070,7 +6822,7 @@
           <a:bodyPr wrap="square" lIns="0" tIns="0" rIns="0" bIns="0" rtlCol="0" anchor="t"/>
           <a:lstStyle/>
           <a:p>
-            <a:pPr algn="l" marL="177800" indent="-177800">
+            <a:pPr marL="177800" indent="-177800" algn="l">
               <a:lnSpc>
                 <a:spcPct val="112000"/>
               </a:lnSpc>
@@ -7094,7 +6846,7 @@
             <a:endParaRPr lang="en-US" sz="1300" dirty="0"/>
           </a:p>
           <a:p>
-            <a:pPr algn="l" marL="177800" indent="-177800">
+            <a:pPr marL="177800" indent="-177800" algn="l">
               <a:lnSpc>
                 <a:spcPct val="112000"/>
               </a:lnSpc>
@@ -7118,7 +6870,7 @@
             <a:endParaRPr lang="en-US" sz="1300" dirty="0"/>
           </a:p>
           <a:p>
-            <a:pPr algn="l" marL="177800" indent="-177800">
+            <a:pPr marL="177800" indent="-177800" algn="l">
               <a:lnSpc>
                 <a:spcPct val="112000"/>
               </a:lnSpc>
@@ -7162,6 +6914,13 @@
           </a:solidFill>
           <a:ln/>
         </p:spPr>
+        <p:txBody>
+          <a:bodyPr/>
+          <a:lstStyle/>
+          <a:p>
+            <a:endParaRPr lang="en-US"/>
+          </a:p>
+        </p:txBody>
       </p:sp>
       <p:sp>
         <p:nvSpPr>
@@ -7182,6 +6941,13 @@
           </a:solidFill>
           <a:ln/>
         </p:spPr>
+        <p:txBody>
+          <a:bodyPr/>
+          <a:lstStyle/>
+          <a:p>
+            <a:endParaRPr lang="en-US"/>
+          </a:p>
+        </p:txBody>
       </p:sp>
       <p:sp>
         <p:nvSpPr>
@@ -7204,20 +6970,9 @@
           <a:bodyPr wrap="square" lIns="0" tIns="0" rIns="0" bIns="0" rtlCol="0" anchor="ctr"/>
           <a:lstStyle/>
           <a:p>
-            <a:pPr indent="0" marL="0">
-              <a:buNone/>
-            </a:pPr>
-            <a:r>
-              <a:rPr lang="en-US" sz="1000" b="1" spc="300" kern="0" dirty="0">
-                <a:solidFill>
-                  <a:srgbClr val="CC785C"/>
-                </a:solidFill>
-                <a:latin typeface="Menlo" pitchFamily="34" charset="0"/>
-                <a:ea typeface="Menlo" pitchFamily="34" charset="-122"/>
-                <a:cs typeface="Menlo" pitchFamily="34" charset="-120"/>
-              </a:rPr>
-              <a:t>IF ASKED</a:t>
-            </a:r>
+            <a:pPr marL="0" indent="0">
+              <a:buNone/>
+            </a:pPr>
             <a:endParaRPr lang="en-US" sz="1000" dirty="0"/>
           </a:p>
         </p:txBody>
@@ -7230,7 +6985,7 @@
         </p:nvSpPr>
         <p:spPr>
           <a:xfrm>
-            <a:off x="7836408" y="4800600"/>
+            <a:off x="7836408" y="4574640"/>
             <a:ext cx="3687775" cy="1234440"/>
           </a:xfrm>
           <a:prstGeom prst="rect">
@@ -7243,7 +6998,7 @@
           <a:bodyPr wrap="square" lIns="0" tIns="0" rIns="0" bIns="0" rtlCol="0" anchor="t"/>
           <a:lstStyle/>
           <a:p>
-            <a:pPr algn="l" indent="0" marL="0">
+            <a:pPr marL="0" indent="0" algn="l">
               <a:lnSpc>
                 <a:spcPct val="118000"/>
               </a:lnSpc>
@@ -7260,54 +7015,48 @@
               </a:rPr>
               <a:t>Q  </a:t>
             </a:r>
-            <a:pPr algn="l" indent="0" marL="0">
+            <a:r>
+              <a:rPr lang="en-US" sz="1200" i="1" dirty="0">
+                <a:solidFill>
+                  <a:srgbClr val="1A1A1A"/>
+                </a:solidFill>
+                <a:latin typeface="Georgia" pitchFamily="34" charset="0"/>
+                <a:ea typeface="Georgia" pitchFamily="34" charset="-122"/>
+                <a:cs typeface="Georgia" pitchFamily="34" charset="-120"/>
+              </a:rPr>
+              <a:t>Why are most of them ‘negative’ features?</a:t>
+            </a:r>
+            <a:endParaRPr lang="en-US" sz="1200" dirty="0"/>
+          </a:p>
+          <a:p>
+            <a:pPr marL="0" indent="0" algn="l">
               <a:lnSpc>
                 <a:spcPct val="118000"/>
               </a:lnSpc>
               <a:buNone/>
             </a:pPr>
             <a:r>
-              <a:rPr lang="en-US" sz="1200" i="1" dirty="0">
-                <a:solidFill>
-                  <a:srgbClr val="1A1A1A"/>
-                </a:solidFill>
-                <a:latin typeface="Georgia" pitchFamily="34" charset="0"/>
-                <a:ea typeface="Georgia" pitchFamily="34" charset="-122"/>
-                <a:cs typeface="Georgia" pitchFamily="34" charset="-120"/>
-              </a:rPr>
-              <a:t>Why are most of them ‘negative’ features?</a:t>
+              <a:rPr lang="en-US" sz="1200" dirty="0">
+                <a:solidFill>
+                  <a:srgbClr val="000000"/>
+                </a:solidFill>
+                <a:latin typeface="Georgia" pitchFamily="34" charset="0"/>
+                <a:ea typeface="Georgia" pitchFamily="34" charset="-122"/>
+                <a:cs typeface="Georgia" pitchFamily="34" charset="-120"/>
+              </a:rPr>
+              <a:t>
+</a:t>
             </a:r>
             <a:endParaRPr lang="en-US" sz="1200" dirty="0"/>
           </a:p>
           <a:p>
-            <a:pPr algn="l" indent="0" marL="0">
+            <a:pPr marL="0" indent="0" algn="l">
               <a:lnSpc>
                 <a:spcPct val="118000"/>
               </a:lnSpc>
               <a:buNone/>
             </a:pPr>
             <a:r>
-              <a:rPr lang="en-US" sz="1200" dirty="0">
-                <a:solidFill>
-                  <a:srgbClr val="000000"/>
-                </a:solidFill>
-                <a:latin typeface="Georgia" pitchFamily="34" charset="0"/>
-                <a:ea typeface="Georgia" pitchFamily="34" charset="-122"/>
-                <a:cs typeface="Georgia" pitchFamily="34" charset="-120"/>
-              </a:rPr>
-              <a:t>
-</a:t>
-            </a:r>
-            <a:endParaRPr lang="en-US" sz="1200" dirty="0"/>
-          </a:p>
-          <a:p>
-            <a:pPr algn="l" indent="0" marL="0">
-              <a:lnSpc>
-                <a:spcPct val="118000"/>
-              </a:lnSpc>
-              <a:buNone/>
-            </a:pPr>
-            <a:r>
               <a:rPr lang="en-US" sz="1200" b="1" dirty="0">
                 <a:solidFill>
                   <a:srgbClr val="5B5B5B"/>
@@ -7318,12 +7067,6 @@
               </a:rPr>
               <a:t>A  </a:t>
             </a:r>
-            <a:pPr algn="l" indent="0" marL="0">
-              <a:lnSpc>
-                <a:spcPct val="118000"/>
-              </a:lnSpc>
-              <a:buNone/>
-            </a:pPr>
             <a:r>
               <a:rPr lang="en-US" sz="1200" dirty="0">
                 <a:solidFill>
@@ -7360,11 +7103,11 @@
           <a:bodyPr wrap="square" lIns="0" tIns="0" rIns="0" bIns="0" rtlCol="0" anchor="ctr"/>
           <a:lstStyle/>
           <a:p>
-            <a:pPr algn="l" indent="0" marL="0">
-              <a:buNone/>
-            </a:pPr>
-            <a:r>
-              <a:rPr lang="en-US" sz="800" spc="100" kern="0" dirty="0">
+            <a:pPr marL="0" indent="0" algn="l">
+              <a:buNone/>
+            </a:pPr>
+            <a:r>
+              <a:rPr lang="en-US" sz="800" kern="0" spc="100" dirty="0">
                 <a:solidFill>
                   <a:srgbClr val="9C9489"/>
                 </a:solidFill>
@@ -7394,6 +7137,7 @@
         <a:solidFill>
           <a:srgbClr val="FAF9F5"/>
         </a:solidFill>
+        <a:effectLst/>
       </p:bgPr>
     </p:bg>
     <p:spTree>
@@ -7431,11 +7175,11 @@
           <a:bodyPr wrap="square" lIns="0" tIns="0" rIns="0" bIns="0" rtlCol="0" anchor="ctr"/>
           <a:lstStyle/>
           <a:p>
-            <a:pPr indent="0" marL="0">
-              <a:buNone/>
-            </a:pPr>
-            <a:r>
-              <a:rPr lang="en-US" sz="1000" b="1" spc="400" kern="0" dirty="0">
+            <a:pPr marL="0" indent="0">
+              <a:buNone/>
+            </a:pPr>
+            <a:r>
+              <a:rPr lang="en-US" sz="1000" b="1" kern="0" spc="400" dirty="0">
                 <a:solidFill>
                   <a:srgbClr val="CC785C"/>
                 </a:solidFill>
@@ -7470,7 +7214,7 @@
           <a:bodyPr wrap="square" lIns="0" tIns="0" rIns="0" bIns="0" rtlCol="0" anchor="t"/>
           <a:lstStyle/>
           <a:p>
-            <a:pPr algn="l" indent="0" marL="0">
+            <a:pPr marL="0" indent="0" algn="l">
               <a:buNone/>
             </a:pPr>
             <a:r>
@@ -7512,18 +7256,25 @@
             <a:prstDash val="solid"/>
           </a:ln>
         </p:spPr>
+        <p:txBody>
+          <a:bodyPr/>
+          <a:lstStyle/>
+          <a:p>
+            <a:endParaRPr lang="en-US"/>
+          </a:p>
+        </p:txBody>
       </p:sp>
       <p:pic>
         <p:nvPicPr>
-          <p:cNvPr id="5" name="Image 0" descr="../results/plots/feature_14733_distribution.png">    </p:cNvPr>
+          <p:cNvPr id="5" name="Image 0" descr="../results/plots/feature_14733_distribution.png"/>
           <p:cNvPicPr>
             <a:picLocks noChangeAspect="1"/>
           </p:cNvPicPr>
           <p:nvPr/>
         </p:nvPicPr>
         <p:blipFill>
-          <a:blip r:embed="rId1"/>
-          <a:srcRect l="0" r="0" t="0" b="0"/>
+          <a:blip r:embed="rId3"/>
+          <a:srcRect/>
           <a:stretch/>
         </p:blipFill>
         <p:spPr>
@@ -7557,11 +7308,11 @@
           <a:bodyPr wrap="square" lIns="0" tIns="0" rIns="0" bIns="0" rtlCol="0" anchor="ctr"/>
           <a:lstStyle/>
           <a:p>
-            <a:pPr indent="0" marL="0">
-              <a:buNone/>
-            </a:pPr>
-            <a:r>
-              <a:rPr lang="en-US" sz="1100" b="1" spc="300" kern="0" dirty="0">
+            <a:pPr marL="0" indent="0">
+              <a:buNone/>
+            </a:pPr>
+            <a:r>
+              <a:rPr lang="en-US" sz="1100" b="1" kern="0" spc="300" dirty="0">
                 <a:solidFill>
                   <a:srgbClr val="CC785C"/>
                 </a:solidFill>
@@ -7596,7 +7347,7 @@
           <a:bodyPr wrap="square" lIns="0" tIns="0" rIns="0" bIns="0" rtlCol="0" anchor="t"/>
           <a:lstStyle/>
           <a:p>
-            <a:pPr algn="l" marL="177800" indent="-177800">
+            <a:pPr marL="177800" indent="-177800" algn="l">
               <a:lnSpc>
                 <a:spcPct val="112000"/>
               </a:lnSpc>
@@ -7620,7 +7371,7 @@
             <a:endParaRPr lang="en-US" sz="1300" dirty="0"/>
           </a:p>
           <a:p>
-            <a:pPr algn="l" marL="177800" indent="-177800">
+            <a:pPr marL="177800" indent="-177800" algn="l">
               <a:lnSpc>
                 <a:spcPct val="112000"/>
               </a:lnSpc>
@@ -7644,7 +7395,7 @@
             <a:endParaRPr lang="en-US" sz="1300" dirty="0"/>
           </a:p>
           <a:p>
-            <a:pPr algn="l" marL="177800" indent="-177800">
+            <a:pPr marL="177800" indent="-177800" algn="l">
               <a:lnSpc>
                 <a:spcPct val="112000"/>
               </a:lnSpc>
@@ -7688,6 +7439,13 @@
           </a:solidFill>
           <a:ln/>
         </p:spPr>
+        <p:txBody>
+          <a:bodyPr/>
+          <a:lstStyle/>
+          <a:p>
+            <a:endParaRPr lang="en-US"/>
+          </a:p>
+        </p:txBody>
       </p:sp>
       <p:sp>
         <p:nvSpPr>
@@ -7708,6 +7466,13 @@
           </a:solidFill>
           <a:ln/>
         </p:spPr>
+        <p:txBody>
+          <a:bodyPr/>
+          <a:lstStyle/>
+          <a:p>
+            <a:endParaRPr lang="en-US"/>
+          </a:p>
+        </p:txBody>
       </p:sp>
       <p:sp>
         <p:nvSpPr>
@@ -7730,20 +7495,9 @@
           <a:bodyPr wrap="square" lIns="0" tIns="0" rIns="0" bIns="0" rtlCol="0" anchor="ctr"/>
           <a:lstStyle/>
           <a:p>
-            <a:pPr indent="0" marL="0">
-              <a:buNone/>
-            </a:pPr>
-            <a:r>
-              <a:rPr lang="en-US" sz="1000" b="1" spc="300" kern="0" dirty="0">
-                <a:solidFill>
-                  <a:srgbClr val="CC785C"/>
-                </a:solidFill>
-                <a:latin typeface="Menlo" pitchFamily="34" charset="0"/>
-                <a:ea typeface="Menlo" pitchFamily="34" charset="-122"/>
-                <a:cs typeface="Menlo" pitchFamily="34" charset="-120"/>
-              </a:rPr>
-              <a:t>IF ASKED</a:t>
-            </a:r>
+            <a:pPr marL="0" indent="0">
+              <a:buNone/>
+            </a:pPr>
             <a:endParaRPr lang="en-US" sz="1000" dirty="0"/>
           </a:p>
         </p:txBody>
@@ -7756,7 +7510,7 @@
         </p:nvSpPr>
         <p:spPr>
           <a:xfrm>
-            <a:off x="7836408" y="4800600"/>
+            <a:off x="7836408" y="4608576"/>
             <a:ext cx="3687775" cy="1234440"/>
           </a:xfrm>
           <a:prstGeom prst="rect">
@@ -7769,7 +7523,7 @@
           <a:bodyPr wrap="square" lIns="0" tIns="0" rIns="0" bIns="0" rtlCol="0" anchor="t"/>
           <a:lstStyle/>
           <a:p>
-            <a:pPr algn="l" indent="0" marL="0">
+            <a:pPr marL="0" indent="0" algn="l">
               <a:lnSpc>
                 <a:spcPct val="118000"/>
               </a:lnSpc>
@@ -7786,54 +7540,48 @@
               </a:rPr>
               <a:t>Q  </a:t>
             </a:r>
-            <a:pPr algn="l" indent="0" marL="0">
+            <a:r>
+              <a:rPr lang="en-US" sz="1200" i="1" dirty="0">
+                <a:solidFill>
+                  <a:srgbClr val="1A1A1A"/>
+                </a:solidFill>
+                <a:latin typeface="Georgia" pitchFamily="34" charset="0"/>
+                <a:ea typeface="Georgia" pitchFamily="34" charset="-122"/>
+                <a:cs typeface="Georgia" pitchFamily="34" charset="-120"/>
+              </a:rPr>
+              <a:t>Where did the cutoff come from?</a:t>
+            </a:r>
+            <a:endParaRPr lang="en-US" sz="1200" dirty="0"/>
+          </a:p>
+          <a:p>
+            <a:pPr marL="0" indent="0" algn="l">
               <a:lnSpc>
                 <a:spcPct val="118000"/>
               </a:lnSpc>
               <a:buNone/>
             </a:pPr>
             <a:r>
-              <a:rPr lang="en-US" sz="1200" i="1" dirty="0">
-                <a:solidFill>
-                  <a:srgbClr val="1A1A1A"/>
-                </a:solidFill>
-                <a:latin typeface="Georgia" pitchFamily="34" charset="0"/>
-                <a:ea typeface="Georgia" pitchFamily="34" charset="-122"/>
-                <a:cs typeface="Georgia" pitchFamily="34" charset="-120"/>
-              </a:rPr>
-              <a:t>Where did the cutoff come from?</a:t>
+              <a:rPr lang="en-US" sz="1200" dirty="0">
+                <a:solidFill>
+                  <a:srgbClr val="000000"/>
+                </a:solidFill>
+                <a:latin typeface="Georgia" pitchFamily="34" charset="0"/>
+                <a:ea typeface="Georgia" pitchFamily="34" charset="-122"/>
+                <a:cs typeface="Georgia" pitchFamily="34" charset="-120"/>
+              </a:rPr>
+              <a:t>
+</a:t>
             </a:r>
             <a:endParaRPr lang="en-US" sz="1200" dirty="0"/>
           </a:p>
           <a:p>
-            <a:pPr algn="l" indent="0" marL="0">
+            <a:pPr marL="0" indent="0" algn="l">
               <a:lnSpc>
                 <a:spcPct val="118000"/>
               </a:lnSpc>
               <a:buNone/>
             </a:pPr>
             <a:r>
-              <a:rPr lang="en-US" sz="1200" dirty="0">
-                <a:solidFill>
-                  <a:srgbClr val="000000"/>
-                </a:solidFill>
-                <a:latin typeface="Georgia" pitchFamily="34" charset="0"/>
-                <a:ea typeface="Georgia" pitchFamily="34" charset="-122"/>
-                <a:cs typeface="Georgia" pitchFamily="34" charset="-120"/>
-              </a:rPr>
-              <a:t>
-</a:t>
-            </a:r>
-            <a:endParaRPr lang="en-US" sz="1200" dirty="0"/>
-          </a:p>
-          <a:p>
-            <a:pPr algn="l" indent="0" marL="0">
-              <a:lnSpc>
-                <a:spcPct val="118000"/>
-              </a:lnSpc>
-              <a:buNone/>
-            </a:pPr>
-            <a:r>
               <a:rPr lang="en-US" sz="1200" b="1" dirty="0">
                 <a:solidFill>
                   <a:srgbClr val="5B5B5B"/>
@@ -7844,12 +7592,6 @@
               </a:rPr>
               <a:t>A  </a:t>
             </a:r>
-            <a:pPr algn="l" indent="0" marL="0">
-              <a:lnSpc>
-                <a:spcPct val="118000"/>
-              </a:lnSpc>
-              <a:buNone/>
-            </a:pPr>
             <a:r>
               <a:rPr lang="en-US" sz="1200" dirty="0">
                 <a:solidFill>
@@ -7886,11 +7628,11 @@
           <a:bodyPr wrap="square" lIns="0" tIns="0" rIns="0" bIns="0" rtlCol="0" anchor="ctr"/>
           <a:lstStyle/>
           <a:p>
-            <a:pPr algn="l" indent="0" marL="0">
-              <a:buNone/>
-            </a:pPr>
-            <a:r>
-              <a:rPr lang="en-US" sz="800" spc="100" kern="0" dirty="0">
+            <a:pPr marL="0" indent="0" algn="l">
+              <a:buNone/>
+            </a:pPr>
+            <a:r>
+              <a:rPr lang="en-US" sz="800" kern="0" spc="100" dirty="0">
                 <a:solidFill>
                   <a:srgbClr val="9C9489"/>
                 </a:solidFill>
@@ -7920,6 +7662,7 @@
         <a:solidFill>
           <a:srgbClr val="FAF9F5"/>
         </a:solidFill>
+        <a:effectLst/>
       </p:bgPr>
     </p:bg>
     <p:spTree>
@@ -7957,11 +7700,11 @@
           <a:bodyPr wrap="square" lIns="0" tIns="0" rIns="0" bIns="0" rtlCol="0" anchor="ctr"/>
           <a:lstStyle/>
           <a:p>
-            <a:pPr indent="0" marL="0">
-              <a:buNone/>
-            </a:pPr>
-            <a:r>
-              <a:rPr lang="en-US" sz="1000" b="1" spc="400" kern="0" dirty="0">
+            <a:pPr marL="0" indent="0">
+              <a:buNone/>
+            </a:pPr>
+            <a:r>
+              <a:rPr lang="en-US" sz="1000" b="1" kern="0" spc="400" dirty="0">
                 <a:solidFill>
                   <a:srgbClr val="CC785C"/>
                 </a:solidFill>
@@ -7996,7 +7739,7 @@
           <a:bodyPr wrap="square" lIns="0" tIns="0" rIns="0" bIns="0" rtlCol="0" anchor="t"/>
           <a:lstStyle/>
           <a:p>
-            <a:pPr algn="l" indent="0" marL="0">
+            <a:pPr marL="0" indent="0" algn="l">
               <a:buNone/>
             </a:pPr>
             <a:r>
@@ -8038,18 +7781,25 @@
             <a:prstDash val="solid"/>
           </a:ln>
         </p:spPr>
+        <p:txBody>
+          <a:bodyPr/>
+          <a:lstStyle/>
+          <a:p>
+            <a:endParaRPr lang="en-US"/>
+          </a:p>
+        </p:txBody>
       </p:sp>
       <p:pic>
         <p:nvPicPr>
-          <p:cNvPr id="5" name="Image 0" descr="../results/plots/feature_14733_top_sentences.png">    </p:cNvPr>
+          <p:cNvPr id="5" name="Image 0" descr="../results/plots/feature_14733_top_sentences.png"/>
           <p:cNvPicPr>
             <a:picLocks noChangeAspect="1"/>
           </p:cNvPicPr>
           <p:nvPr/>
         </p:nvPicPr>
         <p:blipFill>
-          <a:blip r:embed="rId1"/>
-          <a:srcRect l="0" r="0" t="0" b="0"/>
+          <a:blip r:embed="rId3"/>
+          <a:srcRect/>
           <a:stretch/>
         </p:blipFill>
         <p:spPr>
@@ -8083,11 +7833,11 @@
           <a:bodyPr wrap="square" lIns="0" tIns="0" rIns="0" bIns="0" rtlCol="0" anchor="ctr"/>
           <a:lstStyle/>
           <a:p>
-            <a:pPr indent="0" marL="0">
-              <a:buNone/>
-            </a:pPr>
-            <a:r>
-              <a:rPr lang="en-US" sz="1100" b="1" spc="300" kern="0" dirty="0">
+            <a:pPr marL="0" indent="0">
+              <a:buNone/>
+            </a:pPr>
+            <a:r>
+              <a:rPr lang="en-US" sz="1100" b="1" kern="0" spc="300" dirty="0">
                 <a:solidFill>
                   <a:srgbClr val="CC785C"/>
                 </a:solidFill>
@@ -8122,7 +7872,7 @@
           <a:bodyPr wrap="square" lIns="0" tIns="0" rIns="0" bIns="0" rtlCol="0" anchor="t"/>
           <a:lstStyle/>
           <a:p>
-            <a:pPr algn="l" marL="177800" indent="-177800">
+            <a:pPr marL="177800" indent="-177800" algn="l">
               <a:lnSpc>
                 <a:spcPct val="112000"/>
               </a:lnSpc>
@@ -8146,7 +7896,7 @@
             <a:endParaRPr lang="en-US" sz="1300" dirty="0"/>
           </a:p>
           <a:p>
-            <a:pPr algn="l" marL="177800" indent="-177800">
+            <a:pPr marL="177800" indent="-177800" algn="l">
               <a:lnSpc>
                 <a:spcPct val="112000"/>
               </a:lnSpc>
@@ -8170,7 +7920,7 @@
             <a:endParaRPr lang="en-US" sz="1300" dirty="0"/>
           </a:p>
           <a:p>
-            <a:pPr algn="l" marL="177800" indent="-177800">
+            <a:pPr marL="177800" indent="-177800" algn="l">
               <a:lnSpc>
                 <a:spcPct val="112000"/>
               </a:lnSpc>
@@ -8214,6 +7964,13 @@
           </a:solidFill>
           <a:ln/>
         </p:spPr>
+        <p:txBody>
+          <a:bodyPr/>
+          <a:lstStyle/>
+          <a:p>
+            <a:endParaRPr lang="en-US"/>
+          </a:p>
+        </p:txBody>
       </p:sp>
       <p:sp>
         <p:nvSpPr>
@@ -8234,6 +7991,13 @@
           </a:solidFill>
           <a:ln/>
         </p:spPr>
+        <p:txBody>
+          <a:bodyPr/>
+          <a:lstStyle/>
+          <a:p>
+            <a:endParaRPr lang="en-US"/>
+          </a:p>
+        </p:txBody>
       </p:sp>
       <p:sp>
         <p:nvSpPr>
@@ -8256,20 +8020,9 @@
           <a:bodyPr wrap="square" lIns="0" tIns="0" rIns="0" bIns="0" rtlCol="0" anchor="ctr"/>
           <a:lstStyle/>
           <a:p>
-            <a:pPr indent="0" marL="0">
-              <a:buNone/>
-            </a:pPr>
-            <a:r>
-              <a:rPr lang="en-US" sz="1000" b="1" spc="300" kern="0" dirty="0">
-                <a:solidFill>
-                  <a:srgbClr val="CC785C"/>
-                </a:solidFill>
-                <a:latin typeface="Menlo" pitchFamily="34" charset="0"/>
-                <a:ea typeface="Menlo" pitchFamily="34" charset="-122"/>
-                <a:cs typeface="Menlo" pitchFamily="34" charset="-120"/>
-              </a:rPr>
-              <a:t>IF ASKED</a:t>
-            </a:r>
+            <a:pPr marL="0" indent="0">
+              <a:buNone/>
+            </a:pPr>
             <a:endParaRPr lang="en-US" sz="1000" dirty="0"/>
           </a:p>
         </p:txBody>
@@ -8282,7 +8035,7 @@
         </p:nvSpPr>
         <p:spPr>
           <a:xfrm>
-            <a:off x="7836408" y="4800600"/>
+            <a:off x="7836408" y="4392325"/>
             <a:ext cx="3687775" cy="1234440"/>
           </a:xfrm>
           <a:prstGeom prst="rect">
@@ -8295,7 +8048,7 @@
           <a:bodyPr wrap="square" lIns="0" tIns="0" rIns="0" bIns="0" rtlCol="0" anchor="t"/>
           <a:lstStyle/>
           <a:p>
-            <a:pPr algn="l" indent="0" marL="0">
+            <a:pPr marL="0" indent="0" algn="l">
               <a:lnSpc>
                 <a:spcPct val="118000"/>
               </a:lnSpc>
@@ -8312,54 +8065,48 @@
               </a:rPr>
               <a:t>Q  </a:t>
             </a:r>
-            <a:pPr algn="l" indent="0" marL="0">
+            <a:r>
+              <a:rPr lang="en-US" sz="1200" i="1" dirty="0">
+                <a:solidFill>
+                  <a:srgbClr val="1A1A1A"/>
+                </a:solidFill>
+                <a:latin typeface="Georgia" pitchFamily="34" charset="0"/>
+                <a:ea typeface="Georgia" pitchFamily="34" charset="-122"/>
+                <a:cs typeface="Georgia" pitchFamily="34" charset="-120"/>
+              </a:rPr>
+              <a:t>Two of them are labelled positive — isn’t that a problem?</a:t>
+            </a:r>
+            <a:endParaRPr lang="en-US" sz="1200" dirty="0"/>
+          </a:p>
+          <a:p>
+            <a:pPr marL="0" indent="0" algn="l">
               <a:lnSpc>
                 <a:spcPct val="118000"/>
               </a:lnSpc>
               <a:buNone/>
             </a:pPr>
             <a:r>
-              <a:rPr lang="en-US" sz="1200" i="1" dirty="0">
-                <a:solidFill>
-                  <a:srgbClr val="1A1A1A"/>
-                </a:solidFill>
-                <a:latin typeface="Georgia" pitchFamily="34" charset="0"/>
-                <a:ea typeface="Georgia" pitchFamily="34" charset="-122"/>
-                <a:cs typeface="Georgia" pitchFamily="34" charset="-120"/>
-              </a:rPr>
-              <a:t>Two of them are labelled positive — isn’t that a problem?</a:t>
+              <a:rPr lang="en-US" sz="1200" dirty="0">
+                <a:solidFill>
+                  <a:srgbClr val="000000"/>
+                </a:solidFill>
+                <a:latin typeface="Georgia" pitchFamily="34" charset="0"/>
+                <a:ea typeface="Georgia" pitchFamily="34" charset="-122"/>
+                <a:cs typeface="Georgia" pitchFamily="34" charset="-120"/>
+              </a:rPr>
+              <a:t>
+</a:t>
             </a:r>
             <a:endParaRPr lang="en-US" sz="1200" dirty="0"/>
           </a:p>
           <a:p>
-            <a:pPr algn="l" indent="0" marL="0">
+            <a:pPr marL="0" indent="0" algn="l">
               <a:lnSpc>
                 <a:spcPct val="118000"/>
               </a:lnSpc>
               <a:buNone/>
             </a:pPr>
             <a:r>
-              <a:rPr lang="en-US" sz="1200" dirty="0">
-                <a:solidFill>
-                  <a:srgbClr val="000000"/>
-                </a:solidFill>
-                <a:latin typeface="Georgia" pitchFamily="34" charset="0"/>
-                <a:ea typeface="Georgia" pitchFamily="34" charset="-122"/>
-                <a:cs typeface="Georgia" pitchFamily="34" charset="-120"/>
-              </a:rPr>
-              <a:t>
-</a:t>
-            </a:r>
-            <a:endParaRPr lang="en-US" sz="1200" dirty="0"/>
-          </a:p>
-          <a:p>
-            <a:pPr algn="l" indent="0" marL="0">
-              <a:lnSpc>
-                <a:spcPct val="118000"/>
-              </a:lnSpc>
-              <a:buNone/>
-            </a:pPr>
-            <a:r>
               <a:rPr lang="en-US" sz="1200" b="1" dirty="0">
                 <a:solidFill>
                   <a:srgbClr val="5B5B5B"/>
@@ -8370,12 +8117,6 @@
               </a:rPr>
               <a:t>A  </a:t>
             </a:r>
-            <a:pPr algn="l" indent="0" marL="0">
-              <a:lnSpc>
-                <a:spcPct val="118000"/>
-              </a:lnSpc>
-              <a:buNone/>
-            </a:pPr>
             <a:r>
               <a:rPr lang="en-US" sz="1200" dirty="0">
                 <a:solidFill>
@@ -8412,11 +8153,11 @@
           <a:bodyPr wrap="square" lIns="0" tIns="0" rIns="0" bIns="0" rtlCol="0" anchor="ctr"/>
           <a:lstStyle/>
           <a:p>
-            <a:pPr algn="l" indent="0" marL="0">
-              <a:buNone/>
-            </a:pPr>
-            <a:r>
-              <a:rPr lang="en-US" sz="800" spc="100" kern="0" dirty="0">
+            <a:pPr marL="0" indent="0" algn="l">
+              <a:buNone/>
+            </a:pPr>
+            <a:r>
+              <a:rPr lang="en-US" sz="800" kern="0" spc="100" dirty="0">
                 <a:solidFill>
                   <a:srgbClr val="9C9489"/>
                 </a:solidFill>
@@ -8731,4 +8472,319 @@
     </a:ext>
   </a:extLst>
 </a:theme>
+</file>
+
+<file path=ppt/theme/theme2.xml><?xml version="1.0" encoding="utf-8"?>
+<a:theme xmlns:a="http://schemas.openxmlformats.org/drawingml/2006/main" name="Office Theme">
+  <a:themeElements>
+    <a:clrScheme name="Office">
+      <a:dk1>
+        <a:sysClr val="windowText" lastClr="000000"/>
+      </a:dk1>
+      <a:lt1>
+        <a:sysClr val="window" lastClr="FFFFFF"/>
+      </a:lt1>
+      <a:dk2>
+        <a:srgbClr val="0E2841"/>
+      </a:dk2>
+      <a:lt2>
+        <a:srgbClr val="E8E8E8"/>
+      </a:lt2>
+      <a:accent1>
+        <a:srgbClr val="156082"/>
+      </a:accent1>
+      <a:accent2>
+        <a:srgbClr val="E97132"/>
+      </a:accent2>
+      <a:accent3>
+        <a:srgbClr val="196B24"/>
+      </a:accent3>
+      <a:accent4>
+        <a:srgbClr val="0F9ED5"/>
+      </a:accent4>
+      <a:accent5>
+        <a:srgbClr val="A02B93"/>
+      </a:accent5>
+      <a:accent6>
+        <a:srgbClr val="4EA72E"/>
+      </a:accent6>
+      <a:hlink>
+        <a:srgbClr val="467886"/>
+      </a:hlink>
+      <a:folHlink>
+        <a:srgbClr val="96607D"/>
+      </a:folHlink>
+    </a:clrScheme>
+    <a:fontScheme name="Office">
+      <a:majorFont>
+        <a:latin typeface="Aptos Display" panose="02110004020202020204"/>
+        <a:ea typeface=""/>
+        <a:cs typeface=""/>
+        <a:font script="Jpan" typeface="游ゴシック Light"/>
+        <a:font script="Hang" typeface="맑은 고딕"/>
+        <a:font script="Hans" typeface="等线 Light"/>
+        <a:font script="Hant" typeface="新細明體"/>
+        <a:font script="Arab" typeface="Times New Roman"/>
+        <a:font script="Hebr" typeface="Times New Roman"/>
+        <a:font script="Thai" typeface="Angsana New"/>
+        <a:font script="Ethi" typeface="Nyala"/>
+        <a:font script="Beng" typeface="Vrinda"/>
+        <a:font script="Gujr" typeface="Shruti"/>
+        <a:font script="Khmr" typeface="MoolBoran"/>
+        <a:font script="Knda" typeface="Tunga"/>
+        <a:font script="Guru" typeface="Raavi"/>
+        <a:font script="Cans" typeface="Euphemia"/>
+        <a:font script="Cher" typeface="Plantagenet Cherokee"/>
+        <a:font script="Yiii" typeface="Microsoft Yi Baiti"/>
+        <a:font script="Tibt" typeface="Microsoft Himalaya"/>
+        <a:font script="Thaa" typeface="MV Boli"/>
+        <a:font script="Deva" typeface="Mangal"/>
+        <a:font script="Telu" typeface="Gautami"/>
+        <a:font script="Taml" typeface="Latha"/>
+        <a:font script="Syrc" typeface="Estrangelo Edessa"/>
+        <a:font script="Orya" typeface="Kalinga"/>
+        <a:font script="Mlym" typeface="Kartika"/>
+        <a:font script="Laoo" typeface="DokChampa"/>
+        <a:font script="Sinh" typeface="Iskoola Pota"/>
+        <a:font script="Mong" typeface="Mongolian Baiti"/>
+        <a:font script="Viet" typeface="Times New Roman"/>
+        <a:font script="Uigh" typeface="Microsoft Uighur"/>
+        <a:font script="Geor" typeface="Sylfaen"/>
+        <a:font script="Armn" typeface="Arial"/>
+        <a:font script="Bugi" typeface="Leelawadee UI"/>
+        <a:font script="Bopo" typeface="Microsoft JhengHei"/>
+        <a:font script="Java" typeface="Javanese Text"/>
+        <a:font script="Lisu" typeface="Segoe UI"/>
+        <a:font script="Mymr" typeface="Myanmar Text"/>
+        <a:font script="Nkoo" typeface="Ebrima"/>
+        <a:font script="Olck" typeface="Nirmala UI"/>
+        <a:font script="Osma" typeface="Ebrima"/>
+        <a:font script="Phag" typeface="Phagspa"/>
+        <a:font script="Syrn" typeface="Estrangelo Edessa"/>
+        <a:font script="Syrj" typeface="Estrangelo Edessa"/>
+        <a:font script="Syre" typeface="Estrangelo Edessa"/>
+        <a:font script="Sora" typeface="Nirmala UI"/>
+        <a:font script="Tale" typeface="Microsoft Tai Le"/>
+        <a:font script="Talu" typeface="Microsoft New Tai Lue"/>
+        <a:font script="Tfng" typeface="Ebrima"/>
+      </a:majorFont>
+      <a:minorFont>
+        <a:latin typeface="Aptos" panose="02110004020202020204"/>
+        <a:ea typeface=""/>
+        <a:cs typeface=""/>
+        <a:font script="Jpan" typeface="游ゴシック"/>
+        <a:font script="Hang" typeface="맑은 고딕"/>
+        <a:font script="Hans" typeface="等线"/>
+        <a:font script="Hant" typeface="新細明體"/>
+        <a:font script="Arab" typeface="Arial"/>
+        <a:font script="Hebr" typeface="Arial"/>
+        <a:font script="Thai" typeface="Cordia New"/>
+        <a:font script="Ethi" typeface="Nyala"/>
+        <a:font script="Beng" typeface="Vrinda"/>
+        <a:font script="Gujr" typeface="Shruti"/>
+        <a:font script="Khmr" typeface="DaunPenh"/>
+        <a:font script="Knda" typeface="Tunga"/>
+        <a:font script="Guru" typeface="Raavi"/>
+        <a:font script="Cans" typeface="Euphemia"/>
+        <a:font script="Cher" typeface="Plantagenet Cherokee"/>
+        <a:font script="Yiii" typeface="Microsoft Yi Baiti"/>
+        <a:font script="Tibt" typeface="Microsoft Himalaya"/>
+        <a:font script="Thaa" typeface="MV Boli"/>
+        <a:font script="Deva" typeface="Mangal"/>
+        <a:font script="Telu" typeface="Gautami"/>
+        <a:font script="Taml" typeface="Latha"/>
+        <a:font script="Syrc" typeface="Estrangelo Edessa"/>
+        <a:font script="Orya" typeface="Kalinga"/>
+        <a:font script="Mlym" typeface="Kartika"/>
+        <a:font script="Laoo" typeface="DokChampa"/>
+        <a:font script="Sinh" typeface="Iskoola Pota"/>
+        <a:font script="Mong" typeface="Mongolian Baiti"/>
+        <a:font script="Viet" typeface="Arial"/>
+        <a:font script="Uigh" typeface="Microsoft Uighur"/>
+        <a:font script="Geor" typeface="Sylfaen"/>
+        <a:font script="Armn" typeface="Arial"/>
+        <a:font script="Bugi" typeface="Leelawadee UI"/>
+        <a:font script="Bopo" typeface="Microsoft JhengHei"/>
+        <a:font script="Java" typeface="Javanese Text"/>
+        <a:font script="Lisu" typeface="Segoe UI"/>
+        <a:font script="Mymr" typeface="Myanmar Text"/>
+        <a:font script="Nkoo" typeface="Ebrima"/>
+        <a:font script="Olck" typeface="Nirmala UI"/>
+        <a:font script="Osma" typeface="Ebrima"/>
+        <a:font script="Phag" typeface="Phagspa"/>
+        <a:font script="Syrn" typeface="Estrangelo Edessa"/>
+        <a:font script="Syrj" typeface="Estrangelo Edessa"/>
+        <a:font script="Syre" typeface="Estrangelo Edessa"/>
+        <a:font script="Sora" typeface="Nirmala UI"/>
+        <a:font script="Tale" typeface="Microsoft Tai Le"/>
+        <a:font script="Talu" typeface="Microsoft New Tai Lue"/>
+        <a:font script="Tfng" typeface="Ebrima"/>
+      </a:minorFont>
+    </a:fontScheme>
+    <a:fmtScheme name="Office">
+      <a:fillStyleLst>
+        <a:solidFill>
+          <a:schemeClr val="phClr"/>
+        </a:solidFill>
+        <a:gradFill rotWithShape="1">
+          <a:gsLst>
+            <a:gs pos="0">
+              <a:schemeClr val="phClr">
+                <a:lumMod val="110000"/>
+                <a:satMod val="105000"/>
+                <a:tint val="67000"/>
+              </a:schemeClr>
+            </a:gs>
+            <a:gs pos="50000">
+              <a:schemeClr val="phClr">
+                <a:lumMod val="105000"/>
+                <a:satMod val="103000"/>
+                <a:tint val="73000"/>
+              </a:schemeClr>
+            </a:gs>
+            <a:gs pos="100000">
+              <a:schemeClr val="phClr">
+                <a:lumMod val="105000"/>
+                <a:satMod val="109000"/>
+                <a:tint val="81000"/>
+              </a:schemeClr>
+            </a:gs>
+          </a:gsLst>
+          <a:lin ang="5400000" scaled="0"/>
+        </a:gradFill>
+        <a:gradFill rotWithShape="1">
+          <a:gsLst>
+            <a:gs pos="0">
+              <a:schemeClr val="phClr">
+                <a:satMod val="103000"/>
+                <a:lumMod val="102000"/>
+                <a:tint val="94000"/>
+              </a:schemeClr>
+            </a:gs>
+            <a:gs pos="50000">
+              <a:schemeClr val="phClr">
+                <a:satMod val="110000"/>
+                <a:lumMod val="100000"/>
+                <a:shade val="100000"/>
+              </a:schemeClr>
+            </a:gs>
+            <a:gs pos="100000">
+              <a:schemeClr val="phClr">
+                <a:lumMod val="99000"/>
+                <a:satMod val="120000"/>
+                <a:shade val="78000"/>
+              </a:schemeClr>
+            </a:gs>
+          </a:gsLst>
+          <a:lin ang="5400000" scaled="0"/>
+        </a:gradFill>
+      </a:fillStyleLst>
+      <a:lnStyleLst>
+        <a:ln w="12700" cap="flat" cmpd="sng" algn="ctr">
+          <a:solidFill>
+            <a:schemeClr val="phClr"/>
+          </a:solidFill>
+          <a:prstDash val="solid"/>
+          <a:miter lim="800000"/>
+        </a:ln>
+        <a:ln w="19050" cap="flat" cmpd="sng" algn="ctr">
+          <a:solidFill>
+            <a:schemeClr val="phClr"/>
+          </a:solidFill>
+          <a:prstDash val="solid"/>
+          <a:miter lim="800000"/>
+        </a:ln>
+        <a:ln w="25400" cap="flat" cmpd="sng" algn="ctr">
+          <a:solidFill>
+            <a:schemeClr val="phClr"/>
+          </a:solidFill>
+          <a:prstDash val="solid"/>
+          <a:miter lim="800000"/>
+        </a:ln>
+      </a:lnStyleLst>
+      <a:effectStyleLst>
+        <a:effectStyle>
+          <a:effectLst/>
+        </a:effectStyle>
+        <a:effectStyle>
+          <a:effectLst/>
+        </a:effectStyle>
+        <a:effectStyle>
+          <a:effectLst>
+            <a:outerShdw blurRad="57150" dist="19050" dir="5400000" algn="ctr" rotWithShape="0">
+              <a:srgbClr val="000000">
+                <a:alpha val="63000"/>
+              </a:srgbClr>
+            </a:outerShdw>
+          </a:effectLst>
+        </a:effectStyle>
+      </a:effectStyleLst>
+      <a:bgFillStyleLst>
+        <a:solidFill>
+          <a:schemeClr val="phClr"/>
+        </a:solidFill>
+        <a:solidFill>
+          <a:schemeClr val="phClr">
+            <a:tint val="95000"/>
+            <a:satMod val="170000"/>
+          </a:schemeClr>
+        </a:solidFill>
+        <a:gradFill rotWithShape="1">
+          <a:gsLst>
+            <a:gs pos="0">
+              <a:schemeClr val="phClr">
+                <a:tint val="93000"/>
+                <a:satMod val="150000"/>
+                <a:shade val="98000"/>
+                <a:lumMod val="102000"/>
+              </a:schemeClr>
+            </a:gs>
+            <a:gs pos="50000">
+              <a:schemeClr val="phClr">
+                <a:tint val="98000"/>
+                <a:satMod val="130000"/>
+                <a:shade val="90000"/>
+                <a:lumMod val="103000"/>
+              </a:schemeClr>
+            </a:gs>
+            <a:gs pos="100000">
+              <a:schemeClr val="phClr">
+                <a:shade val="63000"/>
+                <a:satMod val="120000"/>
+              </a:schemeClr>
+            </a:gs>
+          </a:gsLst>
+          <a:lin ang="5400000" scaled="0"/>
+        </a:gradFill>
+      </a:bgFillStyleLst>
+    </a:fmtScheme>
+  </a:themeElements>
+  <a:objectDefaults>
+    <a:lnDef>
+      <a:spPr/>
+      <a:bodyPr/>
+      <a:lstStyle/>
+      <a:style>
+        <a:lnRef idx="2">
+          <a:schemeClr val="accent1"/>
+        </a:lnRef>
+        <a:fillRef idx="0">
+          <a:schemeClr val="accent1"/>
+        </a:fillRef>
+        <a:effectRef idx="1">
+          <a:schemeClr val="accent1"/>
+        </a:effectRef>
+        <a:fontRef idx="minor">
+          <a:schemeClr val="tx1"/>
+        </a:fontRef>
+      </a:style>
+    </a:lnDef>
+  </a:objectDefaults>
+  <a:extraClrSchemeLst/>
+  <a:extLst>
+    <a:ext uri="{05A4C25C-085E-4340-85A3-A5531E510DB2}">
+      <thm15:themeFamily xmlns:thm15="http://schemas.microsoft.com/office/thememl/2012/main" name="Office Theme" id="{2E142A2C-CD16-42D6-873A-C26D2A0506FA}" vid="{1BDDFF52-6CD6-40A5-AB3C-68EB2F1E4D0A}"/>
+    </a:ext>
+  </a:extLst>
+</a:theme>
 </file>